--- a/1 Year 12 Weekly/Week 04 (21 Sep) 1.1.3 Storage + 2.1.1 Abstraction/1 Lesson 2.1.1.pptx
+++ b/1 Year 12 Weekly/Week 04 (21 Sep) 1.1.3 Storage + 2.1.1 Abstraction/1 Lesson 2.1.1.pptx
@@ -19,6 +19,22 @@
     <p:sldId id="267" r:id="rId18"/>
     <p:sldId id="268" r:id="rId19"/>
     <p:sldId id="269" r:id="rId20"/>
+    <p:sldId id="270" r:id="rId21"/>
+    <p:sldId id="271" r:id="rId22"/>
+    <p:sldId id="272" r:id="rId23"/>
+    <p:sldId id="273" r:id="rId24"/>
+    <p:sldId id="274" r:id="rId25"/>
+    <p:sldId id="275" r:id="rId26"/>
+    <p:sldId id="276" r:id="rId27"/>
+    <p:sldId id="277" r:id="rId28"/>
+    <p:sldId id="278" r:id="rId29"/>
+    <p:sldId id="279" r:id="rId30"/>
+    <p:sldId id="280" r:id="rId31"/>
+    <p:sldId id="281" r:id="rId32"/>
+    <p:sldId id="282" r:id="rId33"/>
+    <p:sldId id="283" r:id="rId34"/>
+    <p:sldId id="284" r:id="rId35"/>
+    <p:sldId id="285" r:id="rId36"/>
   </p:sldIdLst>
   <p:sldSz cx="12191695" cy="6858000" type="screen4x3"/>
   <p:notesSz cx="6858000" cy="9144000"/>
@@ -3183,7 +3199,7 @@
                 </a:solidFill>
                 <a:latin typeface="Calibri"/>
               </a:rPr>
-              <a:t>Lesson deck — editable skeleton: adapt freely.</a:t>
+              <a:t>Week 04 (21 Sep)</a:t>
             </a:r>
           </a:p>
         </p:txBody>
@@ -3243,7 +3259,7 @@
                 </a:solidFill>
                 <a:latin typeface="Calibri"/>
               </a:rPr>
-              <a:t>Exam technique</a:t>
+              <a:t>Abstraction versus reality</a:t>
             </a:r>
           </a:p>
         </p:txBody>
@@ -3272,37 +3288,49 @@
           <a:p>
             <a:pPr/>
             <a:r>
-              <a:rPr sz="2200" b="0">
-                <a:solidFill>
-                  <a:srgbClr val="222222"/>
-                </a:solidFill>
-                <a:latin typeface="Calibri"/>
-              </a:rPr>
-              <a:t>Name the specific detail you keep AND the detail you discard.</a:t>
+              <a:rPr sz="2000" b="0">
+                <a:solidFill>
+                  <a:srgbClr val="222222"/>
+                </a:solidFill>
+                <a:latin typeface="Calibri"/>
+              </a:rPr>
+              <a:t>An abstraction always contains less detail than the real thing it models</a:t>
             </a:r>
           </a:p>
           <a:p>
             <a:pPr/>
             <a:r>
-              <a:rPr sz="2200" b="0">
-                <a:solidFill>
-                  <a:srgbClr val="222222"/>
-                </a:solidFill>
-                <a:latin typeface="Calibri"/>
-              </a:rPr>
-              <a:t>Justify why each discarded detail is irrelevant to this problem.</a:t>
+              <a:rPr sz="2000" b="0">
+                <a:solidFill>
+                  <a:srgbClr val="222222"/>
+                </a:solidFill>
+                <a:latin typeface="Calibri"/>
+              </a:rPr>
+              <a:t>The Tube map discards true geography and scale but keeps lines, station order and interchanges</a:t>
             </a:r>
           </a:p>
           <a:p>
             <a:pPr/>
             <a:r>
-              <a:rPr sz="2200" b="0">
-                <a:solidFill>
-                  <a:srgbClr val="222222"/>
-                </a:solidFill>
-                <a:latin typeface="Calibri"/>
-              </a:rPr>
-              <a:t>Generic definitions score poorly; the marks are for applied reasoning.</a:t>
+              <a:rPr sz="2000" b="0">
+                <a:solidFill>
+                  <a:srgbClr val="222222"/>
+                </a:solidFill>
+                <a:latin typeface="Calibri"/>
+              </a:rPr>
+              <a:t>It is not wrong: it perfectly serves the purpose of planning which line to take</a:t>
+            </a:r>
+          </a:p>
+          <a:p>
+            <a:pPr/>
+            <a:r>
+              <a:rPr sz="2000" b="0">
+                <a:solidFill>
+                  <a:srgbClr val="222222"/>
+                </a:solidFill>
+                <a:latin typeface="Calibri"/>
+              </a:rPr>
+              <a:t>Two correct abstractions of the same thing can look completely different if their purposes differ</a:t>
             </a:r>
           </a:p>
         </p:txBody>
@@ -3362,7 +3390,7 @@
                 </a:solidFill>
                 <a:latin typeface="Calibri"/>
               </a:rPr>
-              <a:t>Worked example</a:t>
+              <a:t>Keep or discard? It depends on the purpose</a:t>
             </a:r>
           </a:p>
         </p:txBody>
@@ -3391,29 +3419,17 @@
           <a:p>
             <a:pPr/>
             <a:r>
-              <a:rPr sz="2200" b="1">
-                <a:solidFill>
-                  <a:srgbClr val="2B6CB0"/>
-                </a:solidFill>
-                <a:latin typeface="Calibri"/>
-              </a:rPr>
-              <a:t>Abstracting a 'car' for a top-down racing game</a:t>
-            </a:r>
-          </a:p>
-          <a:p>
-            <a:pPr lvl="1"/>
-            <a:r>
               <a:rPr sz="2000" b="0">
                 <a:solidFill>
                   <a:srgbClr val="222222"/>
                 </a:solidFill>
                 <a:latin typeface="Calibri"/>
               </a:rPr>
-              <a:t>1. Identify the problem: model a car well enough to race it from a top-down view.</a:t>
-            </a:r>
-          </a:p>
-          <a:p>
-            <a:pPr lvl="1"/>
+              <a:t>There is no universal list of irrelevant detail; relevance is relative to the stated problem</a:t>
+            </a:r>
+          </a:p>
+          <a:p>
+            <a:pPr/>
             <a:r>
               <a:rPr sz="2000" b="0">
                 <a:solidFill>
@@ -3421,11 +3437,11 @@
                 </a:solidFill>
                 <a:latin typeface="Calibri"/>
               </a:rPr>
-              <a:t>2. Keep: position/coordinates on the track — needed to draw and move the car.</a:t>
-            </a:r>
-          </a:p>
-          <a:p>
-            <a:pPr lvl="1"/>
+              <a:t>For a journey planner, live bus GPS is irrelevant; for a where-is-my-bus app it is essential</a:t>
+            </a:r>
+          </a:p>
+          <a:p>
+            <a:pPr/>
             <a:r>
               <a:rPr sz="2000" b="0">
                 <a:solidFill>
@@ -3433,11 +3449,11 @@
                 </a:solidFill>
                 <a:latin typeface="Calibri"/>
               </a:rPr>
-              <a:t>3. Keep: speed/velocity and heading/direction — needed to simulate movement and handling.</a:t>
-            </a:r>
-          </a:p>
-          <a:p>
-            <a:pPr lvl="1"/>
+              <a:t>A good answer names specific data to keep, specific detail to discard, and justifies each discard</a:t>
+            </a:r>
+          </a:p>
+          <a:p>
+            <a:pPr/>
             <a:r>
               <a:rPr sz="2000" b="0">
                 <a:solidFill>
@@ -3445,31 +3461,19 @@
                 </a:solidFill>
                 <a:latin typeface="Calibri"/>
               </a:rPr>
-              <a:t>4. Discard: the engine's chemistry, exact paint colour and VIN.</a:t>
-            </a:r>
-          </a:p>
-          <a:p>
-            <a:pPr lvl="1"/>
-            <a:r>
-              <a:rPr sz="2000" b="0">
-                <a:solidFill>
-                  <a:srgbClr val="222222"/>
-                </a:solidFill>
-                <a:latin typeface="Calibri"/>
-              </a:rPr>
-              <a:t>5. Justify the discard: none of these affect how the car behaves or is driven in the race, so they add complexity without value.</a:t>
-            </a:r>
-          </a:p>
-          <a:p>
-            <a:pPr lvl="1"/>
-            <a:r>
-              <a:rPr sz="2000" b="0">
-                <a:solidFill>
-                  <a:srgbClr val="222222"/>
-                </a:solidFill>
-                <a:latin typeface="Calibri"/>
-              </a:rPr>
-              <a:t>6. State the type: this is representational abstraction — one specific thing simplified into a workable model.</a:t>
+              <a:t>Removing a NECESSARY detail breaks the model: a canteen map without the turnings fails its user</a:t>
+            </a:r>
+          </a:p>
+          <a:p>
+            <a:pPr/>
+            <a:r>
+              <a:rPr sz="1800" b="1">
+                <a:solidFill>
+                  <a:srgbClr val="B76E00"/>
+                </a:solidFill>
+                <a:latin typeface="Calibri"/>
+              </a:rPr>
+              <a:t>The justification of each discarded detail usually carries the mark, not the list itself.</a:t>
             </a:r>
           </a:p>
         </p:txBody>
@@ -3529,7 +3533,7 @@
                 </a:solidFill>
                 <a:latin typeface="Calibri"/>
               </a:rPr>
-              <a:t>Your turn</a:t>
+              <a:t>Devising an abstract model: a method</a:t>
             </a:r>
           </a:p>
         </p:txBody>
@@ -3558,48 +3562,49 @@
           <a:p>
             <a:pPr/>
             <a:r>
-              <a:rPr sz="2400" b="1">
-                <a:solidFill>
-                  <a:srgbClr val="2B6CB0"/>
-                </a:solidFill>
-                <a:latin typeface="Calibri"/>
-              </a:rPr>
-              <a:t>Task</a:t>
-            </a:r>
-          </a:p>
-          <a:p>
-            <a:pPr lvl="1"/>
-            <a:r>
-              <a:rPr sz="2200" b="0">
-                <a:solidFill>
-                  <a:srgbClr val="222222"/>
-                </a:solidFill>
-                <a:latin typeface="Calibri"/>
-              </a:rPr>
-              <a:t>A hospital wants software to manage patient appointments. Using abstraction, design a model of a 'patient'. Name three pieces of data the model should KEEP, two real-world details it should DISCARD, and justify why each discarded detail is irrelevant to the appointments problem.</a:t>
-            </a:r>
-          </a:p>
-          <a:p>
-            <a:r>
-              <a:rPr sz="2400" b="1">
-                <a:solidFill>
-                  <a:srgbClr val="B76E00"/>
-                </a:solidFill>
-                <a:latin typeface="Calibri"/>
-              </a:rPr>
-              <a:t>Challenge / stretch</a:t>
-            </a:r>
-          </a:p>
-          <a:p>
-            <a:pPr lvl="1"/>
-            <a:r>
-              <a:rPr sz="2200" b="0">
-                <a:solidFill>
-                  <a:srgbClr val="222222"/>
-                </a:solidFill>
-                <a:latin typeface="Calibri"/>
-              </a:rPr>
-              <a:t>A weather simulation models continuous air as a discrete 3-D grid of cells. Explain why this is an act of abstraction, what detail it discards, and one consequence (good or bad) of choosing a coarser grid.</a:t>
+              <a:rPr sz="2000" b="0">
+                <a:solidFill>
+                  <a:srgbClr val="222222"/>
+                </a:solidFill>
+                <a:latin typeface="Calibri"/>
+              </a:rPr>
+              <a:t>State the problem precisely: what questions must the model answer?</a:t>
+            </a:r>
+          </a:p>
+          <a:p>
+            <a:pPr/>
+            <a:r>
+              <a:rPr sz="2000" b="0">
+                <a:solidFill>
+                  <a:srgbClr val="222222"/>
+                </a:solidFill>
+                <a:latin typeface="Calibri"/>
+              </a:rPr>
+              <a:t>List candidate details of the real thing, then sort into keep and discard against that problem</a:t>
+            </a:r>
+          </a:p>
+          <a:p>
+            <a:pPr/>
+            <a:r>
+              <a:rPr sz="2000" b="0">
+                <a:solidFill>
+                  <a:srgbClr val="222222"/>
+                </a:solidFill>
+                <a:latin typeface="Calibri"/>
+              </a:rPr>
+              <a:t>Choose a representation for what is kept: variables, records, a graph of nodes and edges</a:t>
+            </a:r>
+          </a:p>
+          <a:p>
+            <a:pPr/>
+            <a:r>
+              <a:rPr sz="2000" b="0">
+                <a:solidFill>
+                  <a:srgbClr val="222222"/>
+                </a:solidFill>
+                <a:latin typeface="Calibri"/>
+              </a:rPr>
+              <a:t>Check: can the model still answer every question the problem asks? If yes, stop adding detail</a:t>
             </a:r>
           </a:p>
         </p:txBody>
@@ -3659,7 +3664,7 @@
                 </a:solidFill>
                 <a:latin typeface="Calibri"/>
               </a:rPr>
-              <a:t>Exit ticket</a:t>
+              <a:t>Worked pattern: real world to graph</a:t>
             </a:r>
           </a:p>
         </p:txBody>
@@ -3686,36 +3691,51 @@
           </a:bodyPr>
           <a:lstStyle/>
           <a:p>
-            <a:r>
-              <a:rPr sz="2200" b="1">
-                <a:solidFill>
-                  <a:srgbClr val="222222"/>
-                </a:solidFill>
-                <a:latin typeface="Calibri"/>
-              </a:rPr>
-              <a:t>1. A studio models a road network as nodes and weighted edges. Which type of abstraction is this, and what do the edge weights represent?</a:t>
-            </a:r>
-          </a:p>
-          <a:p>
-            <a:r>
-              <a:rPr sz="2200" b="1">
-                <a:solidFill>
-                  <a:srgbClr val="222222"/>
-                </a:solidFill>
-                <a:latin typeface="Calibri"/>
-              </a:rPr>
-              <a:t>2. Why is using one Shape type for circles and squares an example of generalisation?</a:t>
-            </a:r>
-          </a:p>
-          <a:p>
-            <a:r>
-              <a:rPr sz="2200" b="1">
-                <a:solidFill>
-                  <a:srgbClr val="222222"/>
-                </a:solidFill>
-                <a:latin typeface="Calibri"/>
-              </a:rPr>
-              <a:t>3. A student says abstraction means breaking a problem into sub-problems. Correct them.</a:t>
+            <a:pPr/>
+            <a:r>
+              <a:rPr sz="2000" b="0">
+                <a:solidFill>
+                  <a:srgbClr val="222222"/>
+                </a:solidFill>
+                <a:latin typeface="Calibri"/>
+              </a:rPr>
+              <a:t>Many problems reduce to places and connections: roads, flight routes, social networks, network cables</a:t>
+            </a:r>
+          </a:p>
+          <a:p>
+            <a:pPr/>
+            <a:r>
+              <a:rPr sz="2000" b="0">
+                <a:solidFill>
+                  <a:srgbClr val="222222"/>
+                </a:solidFill>
+                <a:latin typeface="Calibri"/>
+              </a:rPr>
+              <a:t>Keep: the points (nodes) and which pairs connect (edges) with a cost (weights)</a:t>
+            </a:r>
+          </a:p>
+          <a:p>
+            <a:pPr/>
+            <a:r>
+              <a:rPr sz="2000" b="0">
+                <a:solidFill>
+                  <a:srgbClr val="222222"/>
+                </a:solidFill>
+                <a:latin typeface="Calibri"/>
+              </a:rPr>
+              <a:t>Discard: scenery, road names, curve shapes — none change the shortest route</a:t>
+            </a:r>
+          </a:p>
+          <a:p>
+            <a:pPr/>
+            <a:r>
+              <a:rPr sz="2000" b="0">
+                <a:solidFill>
+                  <a:srgbClr val="222222"/>
+                </a:solidFill>
+                <a:latin typeface="Calibri"/>
+              </a:rPr>
+              <a:t>This one abstraction lets one algorithm (shortest path) solve every such problem</a:t>
             </a:r>
           </a:p>
         </p:txBody>
@@ -3775,7 +3795,7 @@
                 </a:solidFill>
                 <a:latin typeface="Calibri"/>
               </a:rPr>
-              <a:t>Exit ticket — answers</a:t>
+              <a:t>Abstraction is NOT decomposition</a:t>
             </a:r>
           </a:p>
         </p:txBody>
@@ -3802,72 +3822,838 @@
           </a:bodyPr>
           <a:lstStyle/>
           <a:p>
+            <a:pPr/>
+            <a:r>
+              <a:rPr sz="2000" b="0">
+                <a:solidFill>
+                  <a:srgbClr val="222222"/>
+                </a:solidFill>
+                <a:latin typeface="Calibri"/>
+              </a:rPr>
+              <a:t>Abstraction removes or hides detail to simplify a model</a:t>
+            </a:r>
+          </a:p>
+          <a:p>
+            <a:pPr/>
+            <a:r>
+              <a:rPr sz="2000" b="0">
+                <a:solidFill>
+                  <a:srgbClr val="222222"/>
+                </a:solidFill>
+                <a:latin typeface="Calibri"/>
+              </a:rPr>
+              <a:t>Decomposition breaks a problem into smaller sub-problems</a:t>
+            </a:r>
+          </a:p>
+          <a:p>
+            <a:pPr/>
+            <a:r>
+              <a:rPr sz="2000" b="0">
+                <a:solidFill>
+                  <a:srgbClr val="222222"/>
+                </a:solidFill>
+                <a:latin typeface="Calibri"/>
+              </a:rPr>
+              <a:t>They are different skills, examined separately, and often confused</a:t>
+            </a:r>
+          </a:p>
+          <a:p>
+            <a:pPr/>
+            <a:r>
+              <a:rPr sz="2000" b="0">
+                <a:solidFill>
+                  <a:srgbClr val="222222"/>
+                </a:solidFill>
+                <a:latin typeface="Calibri"/>
+              </a:rPr>
+              <a:t>One sentence check: removing detail = abstraction; splitting into parts = decomposition</a:t>
+            </a:r>
+          </a:p>
+        </p:txBody>
+      </p:sp>
+    </p:spTree>
+  </p:cSld>
+  <p:clrMapOvr>
+    <a:masterClrMapping/>
+  </p:clrMapOvr>
+</p:sld>
+</file>
+
+<file path=ppt/slides/slide15.xml><?xml version="1.0" encoding="utf-8"?>
+<p:sld xmlns:a="http://schemas.openxmlformats.org/drawingml/2006/main" xmlns:p="http://schemas.openxmlformats.org/presentationml/2006/main" xmlns:r="http://schemas.openxmlformats.org/officeDocument/2006/relationships">
+  <p:cSld>
+    <p:bg>
+      <p:bgPr>
+        <a:solidFill>
+          <a:srgbClr val="FFFFFF"/>
+        </a:solidFill>
+        <a:effectLst/>
+      </p:bgPr>
+    </p:bg>
+    <p:spTree>
+      <p:nvGrpSpPr>
+        <p:cNvPr id="1" name=""/>
+        <p:cNvGrpSpPr/>
+        <p:nvPr/>
+      </p:nvGrpSpPr>
+      <p:grpSpPr/>
+      <p:sp>
+        <p:nvSpPr>
+          <p:cNvPr id="2" name="TextBox 1"/>
+          <p:cNvSpPr txBox="1"/>
+          <p:nvPr/>
+        </p:nvSpPr>
+        <p:spPr>
+          <a:xfrm>
+            <a:off x="548640" y="274320"/>
+            <a:ext cx="11064240" cy="822960"/>
+          </a:xfrm>
+          <a:prstGeom prst="rect">
+            <a:avLst/>
+          </a:prstGeom>
+          <a:noFill/>
+        </p:spPr>
+        <p:txBody>
+          <a:bodyPr wrap="square">
+            <a:spAutoFit/>
+          </a:bodyPr>
+          <a:lstStyle/>
+          <a:p>
+            <a:r>
+              <a:rPr sz="3000" b="1" i="0">
+                <a:solidFill>
+                  <a:srgbClr val="2B6CB0"/>
+                </a:solidFill>
+                <a:latin typeface="Calibri"/>
+              </a:rPr>
+              <a:t>The payoff: benefits to name in answers</a:t>
+            </a:r>
+          </a:p>
+        </p:txBody>
+      </p:sp>
+      <p:sp>
+        <p:nvSpPr>
+          <p:cNvPr id="3" name="TextBox 2"/>
+          <p:cNvSpPr txBox="1"/>
+          <p:nvPr/>
+        </p:nvSpPr>
+        <p:spPr>
+          <a:xfrm>
+            <a:off x="640080" y="1280160"/>
+            <a:ext cx="10881360" cy="5120640"/>
+          </a:xfrm>
+          <a:prstGeom prst="rect">
+            <a:avLst/>
+          </a:prstGeom>
+          <a:noFill/>
+        </p:spPr>
+        <p:txBody>
+          <a:bodyPr wrap="square">
+            <a:spAutoFit/>
+          </a:bodyPr>
+          <a:lstStyle/>
+          <a:p>
+            <a:pPr/>
+            <a:r>
+              <a:rPr sz="2000" b="0">
+                <a:solidFill>
+                  <a:srgbClr val="222222"/>
+                </a:solidFill>
+                <a:latin typeface="Calibri"/>
+              </a:rPr>
+              <a:t>Simpler model: quicker to design, build and test</a:t>
+            </a:r>
+          </a:p>
+          <a:p>
+            <a:pPr/>
+            <a:r>
+              <a:rPr sz="2000" b="0">
+                <a:solidFill>
+                  <a:srgbClr val="222222"/>
+                </a:solidFill>
+                <a:latin typeface="Calibri"/>
+              </a:rPr>
+              <a:t>Easier to maintain: less code and fewer places for bugs to hide</a:t>
+            </a:r>
+          </a:p>
+          <a:p>
+            <a:pPr/>
+            <a:r>
+              <a:rPr sz="2000" b="0">
+                <a:solidFill>
+                  <a:srgbClr val="222222"/>
+                </a:solidFill>
+                <a:latin typeface="Calibri"/>
+              </a:rPr>
+              <a:t>Generalised models are easy to extend: new cases reuse the existing model instead of new code</a:t>
+            </a:r>
+          </a:p>
+          <a:p>
+            <a:pPr/>
+            <a:r>
+              <a:rPr sz="2000" b="0">
+                <a:solidFill>
+                  <a:srgbClr val="222222"/>
+                </a:solidFill>
+                <a:latin typeface="Calibri"/>
+              </a:rPr>
+              <a:t>Always tie an abstraction answer back to one of these benefits</a:t>
+            </a:r>
+          </a:p>
+        </p:txBody>
+      </p:sp>
+    </p:spTree>
+  </p:cSld>
+  <p:clrMapOvr>
+    <a:masterClrMapping/>
+  </p:clrMapOvr>
+</p:sld>
+</file>
+
+<file path=ppt/slides/slide16.xml><?xml version="1.0" encoding="utf-8"?>
+<p:sld xmlns:a="http://schemas.openxmlformats.org/drawingml/2006/main" xmlns:p="http://schemas.openxmlformats.org/presentationml/2006/main" xmlns:r="http://schemas.openxmlformats.org/officeDocument/2006/relationships">
+  <p:cSld>
+    <p:bg>
+      <p:bgPr>
+        <a:solidFill>
+          <a:srgbClr val="FFFFFF"/>
+        </a:solidFill>
+        <a:effectLst/>
+      </p:bgPr>
+    </p:bg>
+    <p:spTree>
+      <p:nvGrpSpPr>
+        <p:cNvPr id="1" name=""/>
+        <p:cNvGrpSpPr/>
+        <p:nvPr/>
+      </p:nvGrpSpPr>
+      <p:grpSpPr/>
+      <p:sp>
+        <p:nvSpPr>
+          <p:cNvPr id="2" name="TextBox 1"/>
+          <p:cNvSpPr txBox="1"/>
+          <p:nvPr/>
+        </p:nvSpPr>
+        <p:spPr>
+          <a:xfrm>
+            <a:off x="548640" y="274320"/>
+            <a:ext cx="11064240" cy="822960"/>
+          </a:xfrm>
+          <a:prstGeom prst="rect">
+            <a:avLst/>
+          </a:prstGeom>
+          <a:noFill/>
+        </p:spPr>
+        <p:txBody>
+          <a:bodyPr wrap="square">
+            <a:spAutoFit/>
+          </a:bodyPr>
+          <a:lstStyle/>
+          <a:p>
+            <a:r>
+              <a:rPr sz="3000" b="1" i="0">
+                <a:solidFill>
+                  <a:srgbClr val="2B6CB0"/>
+                </a:solidFill>
+                <a:latin typeface="Calibri"/>
+              </a:rPr>
+              <a:t>Worked example 1</a:t>
+            </a:r>
+          </a:p>
+        </p:txBody>
+      </p:sp>
+      <p:sp>
+        <p:nvSpPr>
+          <p:cNvPr id="3" name="TextBox 2"/>
+          <p:cNvSpPr txBox="1"/>
+          <p:nvPr/>
+        </p:nvSpPr>
+        <p:spPr>
+          <a:xfrm>
+            <a:off x="640080" y="1280160"/>
+            <a:ext cx="10881360" cy="5120640"/>
+          </a:xfrm>
+          <a:prstGeom prst="rect">
+            <a:avLst/>
+          </a:prstGeom>
+          <a:noFill/>
+        </p:spPr>
+        <p:txBody>
+          <a:bodyPr wrap="square">
+            <a:spAutoFit/>
+          </a:bodyPr>
+          <a:lstStyle/>
+          <a:p>
+            <a:pPr/>
             <a:r>
               <a:rPr sz="2200" b="1">
                 <a:solidFill>
-                  <a:srgbClr val="222222"/>
-                </a:solidFill>
-                <a:latin typeface="Calibri"/>
-              </a:rPr>
-              <a:t>1. A studio models a road network as nodes and weighted edges. Which type of abstraction is this, and what do the edge weights represent?</a:t>
+                  <a:srgbClr val="2B6CB0"/>
+                </a:solidFill>
+                <a:latin typeface="Calibri"/>
+              </a:rPr>
+              <a:t>Abstracting a patient for a hospital appointments system</a:t>
             </a:r>
           </a:p>
           <a:p>
             <a:pPr lvl="1"/>
             <a:r>
-              <a:rPr sz="1800" i="1">
+              <a:rPr sz="1900" b="0">
+                <a:solidFill>
+                  <a:srgbClr val="222222"/>
+                </a:solidFill>
+                <a:latin typeface="Calibri"/>
+              </a:rPr>
+              <a:t>1. Problem: schedule appointments and contact patients about them</a:t>
+            </a:r>
+          </a:p>
+          <a:p>
+            <a:pPr lvl="1"/>
+            <a:r>
+              <a:rPr sz="1900" b="0">
+                <a:solidFill>
+                  <a:srgbClr val="222222"/>
+                </a:solidFill>
+                <a:latin typeface="Calibri"/>
+              </a:rPr>
+              <a:t>2. Keep: patient ID and name, date of birth, contact number, GP or clinic, appointment type and duration — each is needed to schedule or to contact the patient</a:t>
+            </a:r>
+          </a:p>
+          <a:p>
+            <a:pPr lvl="1"/>
+            <a:r>
+              <a:rPr sz="1900" b="0">
+                <a:solidFill>
+                  <a:srgbClr val="222222"/>
+                </a:solidFill>
+                <a:latin typeface="Calibri"/>
+              </a:rPr>
+              <a:t>3. Discard: eye colour, favourite food, home decor</a:t>
+            </a:r>
+          </a:p>
+          <a:p>
+            <a:pPr lvl="1"/>
+            <a:r>
+              <a:rPr sz="1900" b="0">
+                <a:solidFill>
+                  <a:srgbClr val="222222"/>
+                </a:solidFill>
+                <a:latin typeface="Calibri"/>
+              </a:rPr>
+              <a:t>4. Justify each discard: none of these affect scheduling or contacting the patient, so including them adds complexity without value</a:t>
+            </a:r>
+          </a:p>
+          <a:p>
+            <a:pPr lvl="1"/>
+            <a:r>
+              <a:rPr sz="1900" b="0">
+                <a:solidFill>
+                  <a:srgbClr val="222222"/>
+                </a:solidFill>
+                <a:latin typeface="Calibri"/>
+              </a:rPr>
+              <a:t>5. Conclusion: keeping only relevant detail makes the system simpler, quicker to build and easier to maintain while still solving the appointments problem</a:t>
+            </a:r>
+          </a:p>
+        </p:txBody>
+      </p:sp>
+    </p:spTree>
+  </p:cSld>
+  <p:clrMapOvr>
+    <a:masterClrMapping/>
+  </p:clrMapOvr>
+</p:sld>
+</file>
+
+<file path=ppt/slides/slide17.xml><?xml version="1.0" encoding="utf-8"?>
+<p:sld xmlns:a="http://schemas.openxmlformats.org/drawingml/2006/main" xmlns:p="http://schemas.openxmlformats.org/presentationml/2006/main" xmlns:r="http://schemas.openxmlformats.org/officeDocument/2006/relationships">
+  <p:cSld>
+    <p:bg>
+      <p:bgPr>
+        <a:solidFill>
+          <a:srgbClr val="FFFFFF"/>
+        </a:solidFill>
+        <a:effectLst/>
+      </p:bgPr>
+    </p:bg>
+    <p:spTree>
+      <p:nvGrpSpPr>
+        <p:cNvPr id="1" name=""/>
+        <p:cNvGrpSpPr/>
+        <p:nvPr/>
+      </p:nvGrpSpPr>
+      <p:grpSpPr/>
+      <p:sp>
+        <p:nvSpPr>
+          <p:cNvPr id="2" name="TextBox 1"/>
+          <p:cNvSpPr txBox="1"/>
+          <p:nvPr/>
+        </p:nvSpPr>
+        <p:spPr>
+          <a:xfrm>
+            <a:off x="548640" y="274320"/>
+            <a:ext cx="11064240" cy="822960"/>
+          </a:xfrm>
+          <a:prstGeom prst="rect">
+            <a:avLst/>
+          </a:prstGeom>
+          <a:noFill/>
+        </p:spPr>
+        <p:txBody>
+          <a:bodyPr wrap="square">
+            <a:spAutoFit/>
+          </a:bodyPr>
+          <a:lstStyle/>
+          <a:p>
+            <a:r>
+              <a:rPr sz="3000" b="1" i="0">
+                <a:solidFill>
+                  <a:srgbClr val="2B6CB0"/>
+                </a:solidFill>
+                <a:latin typeface="Calibri"/>
+              </a:rPr>
+              <a:t>Worked example 2</a:t>
+            </a:r>
+          </a:p>
+        </p:txBody>
+      </p:sp>
+      <p:sp>
+        <p:nvSpPr>
+          <p:cNvPr id="3" name="TextBox 2"/>
+          <p:cNvSpPr txBox="1"/>
+          <p:nvPr/>
+        </p:nvSpPr>
+        <p:spPr>
+          <a:xfrm>
+            <a:off x="640080" y="1280160"/>
+            <a:ext cx="10881360" cy="5120640"/>
+          </a:xfrm>
+          <a:prstGeom prst="rect">
+            <a:avLst/>
+          </a:prstGeom>
+          <a:noFill/>
+        </p:spPr>
+        <p:txBody>
+          <a:bodyPr wrap="square">
+            <a:spAutoFit/>
+          </a:bodyPr>
+          <a:lstStyle/>
+          <a:p>
+            <a:pPr/>
+            <a:r>
+              <a:rPr sz="2200" b="1">
+                <a:solidFill>
+                  <a:srgbClr val="2B6CB0"/>
+                </a:solidFill>
+                <a:latin typeface="Calibri"/>
+              </a:rPr>
+              <a:t>Devising a model: sat-nav road network as a weighted graph</a:t>
+            </a:r>
+          </a:p>
+          <a:p>
+            <a:pPr lvl="1"/>
+            <a:r>
+              <a:rPr sz="1900" b="0">
+                <a:solidFill>
+                  <a:srgbClr val="222222"/>
+                </a:solidFill>
+                <a:latin typeface="Calibri"/>
+              </a:rPr>
+              <a:t>1. Problem: find the fastest route between two locations</a:t>
+            </a:r>
+          </a:p>
+          <a:p>
+            <a:pPr lvl="1"/>
+            <a:r>
+              <a:rPr sz="1900" b="0">
+                <a:solidFill>
+                  <a:srgbClr val="222222"/>
+                </a:solidFill>
+                <a:latin typeface="Calibri"/>
+              </a:rPr>
+              <a:t>2. Keep: junctions and places as nodes; roads between them as edges; average travel time on each road as the edge weight</a:t>
+            </a:r>
+          </a:p>
+          <a:p>
+            <a:pPr lvl="1"/>
+            <a:r>
+              <a:rPr sz="1900" b="0">
+                <a:solidFill>
+                  <a:srgbClr val="222222"/>
+                </a:solidFill>
+                <a:latin typeface="Calibri"/>
+              </a:rPr>
+              <a:t>3. Discard: road surface colour, buildings, scenery, the exact curve of each road — they do not change which route is fastest</a:t>
+            </a:r>
+          </a:p>
+          <a:p>
+            <a:pPr lvl="1"/>
+            <a:r>
+              <a:rPr sz="1900" b="0">
+                <a:solidFill>
+                  <a:srgbClr val="222222"/>
+                </a:solidFill>
+                <a:latin typeface="Calibri"/>
+              </a:rPr>
+              <a:t>4. Represent: a graph where the fastest route is the path with the lowest total weight</a:t>
+            </a:r>
+          </a:p>
+          <a:p>
+            <a:pPr lvl="1"/>
+            <a:r>
+              <a:rPr sz="1900" b="0">
+                <a:solidFill>
+                  <a:srgbClr val="222222"/>
+                </a:solidFill>
+                <a:latin typeface="Calibri"/>
+              </a:rPr>
+              <a:t>5. Check the purpose: to show turn-by-turn directions we must also keep junction names — necessary detail depends on the exact problem</a:t>
+            </a:r>
+          </a:p>
+          <a:p>
+            <a:pPr lvl="1"/>
+            <a:r>
+              <a:rPr sz="1900" b="0">
+                <a:solidFill>
+                  <a:srgbClr val="222222"/>
+                </a:solidFill>
+                <a:latin typeface="Calibri"/>
+              </a:rPr>
+              <a:t>6. Classify: this is representational abstraction (one specific network simplified), though the graph idea itself generalises to any network</a:t>
+            </a:r>
+          </a:p>
+        </p:txBody>
+      </p:sp>
+    </p:spTree>
+  </p:cSld>
+  <p:clrMapOvr>
+    <a:masterClrMapping/>
+  </p:clrMapOvr>
+</p:sld>
+</file>
+
+<file path=ppt/slides/slide18.xml><?xml version="1.0" encoding="utf-8"?>
+<p:sld xmlns:a="http://schemas.openxmlformats.org/drawingml/2006/main" xmlns:p="http://schemas.openxmlformats.org/presentationml/2006/main" xmlns:r="http://schemas.openxmlformats.org/officeDocument/2006/relationships">
+  <p:cSld>
+    <p:bg>
+      <p:bgPr>
+        <a:solidFill>
+          <a:srgbClr val="FFFFFF"/>
+        </a:solidFill>
+        <a:effectLst/>
+      </p:bgPr>
+    </p:bg>
+    <p:spTree>
+      <p:nvGrpSpPr>
+        <p:cNvPr id="1" name=""/>
+        <p:cNvGrpSpPr/>
+        <p:nvPr/>
+      </p:nvGrpSpPr>
+      <p:grpSpPr/>
+      <p:sp>
+        <p:nvSpPr>
+          <p:cNvPr id="2" name="TextBox 1"/>
+          <p:cNvSpPr txBox="1"/>
+          <p:nvPr/>
+        </p:nvSpPr>
+        <p:spPr>
+          <a:xfrm>
+            <a:off x="548640" y="274320"/>
+            <a:ext cx="11064240" cy="822960"/>
+          </a:xfrm>
+          <a:prstGeom prst="rect">
+            <a:avLst/>
+          </a:prstGeom>
+          <a:noFill/>
+        </p:spPr>
+        <p:txBody>
+          <a:bodyPr wrap="square">
+            <a:spAutoFit/>
+          </a:bodyPr>
+          <a:lstStyle/>
+          <a:p>
+            <a:r>
+              <a:rPr sz="3000" b="1" i="0">
+                <a:solidFill>
+                  <a:srgbClr val="2B6CB0"/>
+                </a:solidFill>
+                <a:latin typeface="Calibri"/>
+              </a:rPr>
+              <a:t>Worked example 3</a:t>
+            </a:r>
+          </a:p>
+        </p:txBody>
+      </p:sp>
+      <p:sp>
+        <p:nvSpPr>
+          <p:cNvPr id="3" name="TextBox 2"/>
+          <p:cNvSpPr txBox="1"/>
+          <p:nvPr/>
+        </p:nvSpPr>
+        <p:spPr>
+          <a:xfrm>
+            <a:off x="640080" y="1280160"/>
+            <a:ext cx="10881360" cy="5120640"/>
+          </a:xfrm>
+          <a:prstGeom prst="rect">
+            <a:avLst/>
+          </a:prstGeom>
+          <a:noFill/>
+        </p:spPr>
+        <p:txBody>
+          <a:bodyPr wrap="square">
+            <a:spAutoFit/>
+          </a:bodyPr>
+          <a:lstStyle/>
+          <a:p>
+            <a:pPr/>
+            <a:r>
+              <a:rPr sz="2200" b="1">
+                <a:solidFill>
+                  <a:srgbClr val="2B6CB0"/>
+                </a:solidFill>
+                <a:latin typeface="Calibri"/>
+              </a:rPr>
+              <a:t>Classifying examples: representational or generalisation?</a:t>
+            </a:r>
+          </a:p>
+          <a:p>
+            <a:pPr lvl="1"/>
+            <a:r>
+              <a:rPr sz="1900" b="0">
+                <a:solidFill>
+                  <a:srgbClr val="222222"/>
+                </a:solidFill>
+                <a:latin typeface="Calibri"/>
+              </a:rPr>
+              <a:t>1. Apply the test question: one thing simplified, or many things grouped by shared features?</a:t>
+            </a:r>
+          </a:p>
+          <a:p>
+            <a:pPr lvl="1"/>
+            <a:r>
+              <a:rPr sz="1900" b="0">
+                <a:solidFill>
+                  <a:srgbClr val="222222"/>
+                </a:solidFill>
+                <a:latin typeface="Calibri"/>
+              </a:rPr>
+              <a:t>2. The Tube map: one specific network with detail stripped — representational</a:t>
+            </a:r>
+          </a:p>
+          <a:p>
+            <a:pPr lvl="1"/>
+            <a:r>
+              <a:rPr sz="1900" b="0">
+                <a:solidFill>
+                  <a:srgbClr val="222222"/>
+                </a:solidFill>
+                <a:latin typeface="Calibri"/>
+              </a:rPr>
+              <a:t>3. An Animal superclass for Dog, Cat and Horse: many things grouped by shared characteristics — generalisation</a:t>
+            </a:r>
+          </a:p>
+          <a:p>
+            <a:pPr lvl="1"/>
+            <a:r>
+              <a:rPr sz="1900" b="0">
+                <a:solidFill>
+                  <a:srgbClr val="222222"/>
+                </a:solidFill>
+                <a:latin typeface="Calibri"/>
+              </a:rPr>
+              <a:t>4. A weather model ignoring individual raindrops: one system simplified — representational</a:t>
+            </a:r>
+          </a:p>
+          <a:p>
+            <a:pPr lvl="1"/>
+            <a:r>
+              <a:rPr sz="1900" b="0">
+                <a:solidFill>
+                  <a:srgbClr val="222222"/>
+                </a:solidFill>
+                <a:latin typeface="Calibri"/>
+              </a:rPr>
+              <a:t>5. Treating all customers as name, ID and balance: many people reduced to shared fields — generalisation</a:t>
+            </a:r>
+          </a:p>
+          <a:p>
+            <a:pPr lvl="1"/>
+            <a:r>
+              <a:rPr sz="1900" b="0">
+                <a:solidFill>
+                  <a:srgbClr val="222222"/>
+                </a:solidFill>
+                <a:latin typeface="Calibri"/>
+              </a:rPr>
+              <a:t>6. Takeaway: write the test question in your answer; it shows the examiner your reasoning</a:t>
+            </a:r>
+          </a:p>
+        </p:txBody>
+      </p:sp>
+    </p:spTree>
+  </p:cSld>
+  <p:clrMapOvr>
+    <a:masterClrMapping/>
+  </p:clrMapOvr>
+</p:sld>
+</file>
+
+<file path=ppt/slides/slide19.xml><?xml version="1.0" encoding="utf-8"?>
+<p:sld xmlns:a="http://schemas.openxmlformats.org/drawingml/2006/main" xmlns:p="http://schemas.openxmlformats.org/presentationml/2006/main" xmlns:r="http://schemas.openxmlformats.org/officeDocument/2006/relationships">
+  <p:cSld>
+    <p:bg>
+      <p:bgPr>
+        <a:solidFill>
+          <a:srgbClr val="FFFFFF"/>
+        </a:solidFill>
+        <a:effectLst/>
+      </p:bgPr>
+    </p:bg>
+    <p:spTree>
+      <p:nvGrpSpPr>
+        <p:cNvPr id="1" name=""/>
+        <p:cNvGrpSpPr/>
+        <p:nvPr/>
+      </p:nvGrpSpPr>
+      <p:grpSpPr/>
+      <p:sp>
+        <p:nvSpPr>
+          <p:cNvPr id="2" name="TextBox 1"/>
+          <p:cNvSpPr txBox="1"/>
+          <p:nvPr/>
+        </p:nvSpPr>
+        <p:spPr>
+          <a:xfrm>
+            <a:off x="548640" y="274320"/>
+            <a:ext cx="11064240" cy="822960"/>
+          </a:xfrm>
+          <a:prstGeom prst="rect">
+            <a:avLst/>
+          </a:prstGeom>
+          <a:noFill/>
+        </p:spPr>
+        <p:txBody>
+          <a:bodyPr wrap="square">
+            <a:spAutoFit/>
+          </a:bodyPr>
+          <a:lstStyle/>
+          <a:p>
+            <a:r>
+              <a:rPr sz="3000" b="1" i="0">
+                <a:solidFill>
+                  <a:srgbClr val="2B6CB0"/>
+                </a:solidFill>
+                <a:latin typeface="Calibri"/>
+              </a:rPr>
+              <a:t>Activity 1</a:t>
+            </a:r>
+          </a:p>
+        </p:txBody>
+      </p:sp>
+      <p:sp>
+        <p:nvSpPr>
+          <p:cNvPr id="3" name="TextBox 2"/>
+          <p:cNvSpPr txBox="1"/>
+          <p:nvPr/>
+        </p:nvSpPr>
+        <p:spPr>
+          <a:xfrm>
+            <a:off x="640080" y="1280160"/>
+            <a:ext cx="10881360" cy="5120640"/>
+          </a:xfrm>
+          <a:prstGeom prst="rect">
+            <a:avLst/>
+          </a:prstGeom>
+          <a:noFill/>
+        </p:spPr>
+        <p:txBody>
+          <a:bodyPr wrap="square">
+            <a:spAutoFit/>
+          </a:bodyPr>
+          <a:lstStyle/>
+          <a:p>
+            <a:pPr/>
+            <a:r>
+              <a:rPr sz="2200" b="1">
+                <a:solidFill>
+                  <a:srgbClr val="2B6CB0"/>
+                </a:solidFill>
+                <a:latin typeface="Calibri"/>
+              </a:rPr>
+              <a:t>Map to the Canteen  (20 min)</a:t>
+            </a:r>
+          </a:p>
+          <a:p>
+            <a:pPr lvl="1"/>
+            <a:r>
+              <a:rPr sz="2000" b="0">
+                <a:solidFill>
+                  <a:srgbClr val="222222"/>
+                </a:solidFill>
+                <a:latin typeface="Calibri"/>
+              </a:rPr>
+              <a:t>Without discussion, each student draws directions from this classroom to the canteen for a brand-new Year 7; five minutes, no style rules given</a:t>
+            </a:r>
+          </a:p>
+          <a:p>
+            <a:pPr lvl="1"/>
+            <a:r>
+              <a:rPr sz="2000" b="0">
+                <a:solidFill>
+                  <a:srgbClr val="222222"/>
+                </a:solidFill>
+                <a:latin typeface="Calibri"/>
+              </a:rPr>
+              <a:t>Pairs swap and mentally walk the route, listing what details are on the map and what real-world details were left out (wall colours, door widths, exact distances, rooms passed)</a:t>
+            </a:r>
+          </a:p>
+          <a:p>
+            <a:pPr lvl="1"/>
+            <a:r>
+              <a:rPr sz="2000" b="0">
+                <a:solidFill>
+                  <a:srgbClr val="222222"/>
+                </a:solidFill>
+                <a:latin typeface="Calibri"/>
+              </a:rPr>
+              <a:t>Class harvest in two columns, kept versus discarded, then the key question: why was each discarded detail safe to remove? Because it does not change whether the Year 7 arrives</a:t>
+            </a:r>
+          </a:p>
+          <a:p>
+            <a:pPr lvl="1"/>
+            <a:r>
+              <a:rPr sz="2000" b="0">
+                <a:solidFill>
+                  <a:srgbClr val="222222"/>
+                </a:solidFill>
+                <a:latin typeface="Calibri"/>
+              </a:rPr>
+              <a:t>Introduce the definition only after the experience: abstraction = removing or hiding unnecessary detail so only relevant information remains; show a floor plan or satellite photo — the map is not wrong, it serves a different purpose</a:t>
+            </a:r>
+          </a:p>
+          <a:p>
+            <a:pPr lvl="1"/>
+            <a:r>
+              <a:rPr sz="2000" b="0">
+                <a:solidFill>
+                  <a:srgbClr val="222222"/>
+                </a:solidFill>
+                <a:latin typeface="Calibri"/>
+              </a:rPr>
+              <a:t>Twist round: redraw for a different purpose, a wheelchair user or a fire-evacuation plan; what must be added back (lifts, ramps, all exits) and what can now go?</a:t>
+            </a:r>
+          </a:p>
+          <a:p>
+            <a:pPr/>
+            <a:r>
+              <a:rPr sz="1800" b="0">
                 <a:solidFill>
                   <a:srgbClr val="B76E00"/>
                 </a:solidFill>
                 <a:latin typeface="Calibri"/>
               </a:rPr>
-              <a:t>Answer: Representational abstraction; the edge weights represent the cost of travelling between junctions, e.g. distance or time.</a:t>
-            </a:r>
-          </a:p>
-          <a:p>
-            <a:r>
-              <a:rPr sz="2200" b="1">
-                <a:solidFill>
-                  <a:srgbClr val="222222"/>
-                </a:solidFill>
-                <a:latin typeface="Calibri"/>
-              </a:rPr>
-              <a:t>2. Why is using one Shape type for circles and squares an example of generalisation?</a:t>
-            </a:r>
-          </a:p>
-          <a:p>
-            <a:pPr lvl="1"/>
-            <a:r>
-              <a:rPr sz="1800" i="1">
-                <a:solidFill>
-                  <a:srgbClr val="B76E00"/>
-                </a:solidFill>
-                <a:latin typeface="Calibri"/>
-              </a:rPr>
-              <a:t>Answer: It groups different things by their shared characteristics into a single reusable model, so new shapes can reuse it.</a:t>
-            </a:r>
-          </a:p>
-          <a:p>
-            <a:r>
-              <a:rPr sz="2200" b="1">
-                <a:solidFill>
-                  <a:srgbClr val="222222"/>
-                </a:solidFill>
-                <a:latin typeface="Calibri"/>
-              </a:rPr>
-              <a:t>3. A student says abstraction means breaking a problem into sub-problems. Correct them.</a:t>
-            </a:r>
-          </a:p>
-          <a:p>
-            <a:pPr lvl="1"/>
-            <a:r>
-              <a:rPr sz="1800" i="1">
-                <a:solidFill>
-                  <a:srgbClr val="B76E00"/>
-                </a:solidFill>
-                <a:latin typeface="Calibri"/>
-              </a:rPr>
-              <a:t>Answer: That is decomposition; abstraction removes or hides irrelevant detail to simplify the model.</a:t>
+              <a:t>Stretch: Name the map's interface (the instructions followed) versus its hidden implementation (the actual building), and connect this to a variable being an abstraction of a memory address.</a:t>
             </a:r>
           </a:p>
         </p:txBody>
@@ -3974,7 +4760,7 @@
                 </a:solidFill>
                 <a:latin typeface="Calibri"/>
               </a:rPr>
-              <a:t>Define abstraction as removing or hiding detail irrelevant to a problem, leaving only what is needed to solve it.</a:t>
+              <a:t>I can explain the nature and need for abstraction: removing detail irrelevant to the problem</a:t>
             </a:r>
           </a:p>
           <a:p>
@@ -3986,7 +4772,7 @@
                 </a:solidFill>
                 <a:latin typeface="Calibri"/>
               </a:rPr>
-              <a:t>Distinguish representational abstraction from generalisation/categorisation, and abstraction from decomposition.</a:t>
+              <a:t>I can distinguish representational abstraction from generalisation, with a valid example of each</a:t>
             </a:r>
           </a:p>
           <a:p>
@@ -3998,7 +4784,1477 @@
                 </a:solidFill>
                 <a:latin typeface="Calibri"/>
               </a:rPr>
-              <a:t>Apply abstraction to an unseen scenario by justifying which real-world details are kept and which are discarded.</a:t>
+              <a:t>I can compare an abstraction with reality and justify which details are kept or discarded for a purpose</a:t>
+            </a:r>
+          </a:p>
+          <a:p>
+            <a:pPr lvl="1"/>
+            <a:r>
+              <a:rPr sz="2200" b="0">
+                <a:solidFill>
+                  <a:srgbClr val="222222"/>
+                </a:solidFill>
+                <a:latin typeface="Calibri"/>
+              </a:rPr>
+              <a:t>I can devise an abstract model for a given real-world scenario</a:t>
+            </a:r>
+          </a:p>
+        </p:txBody>
+      </p:sp>
+    </p:spTree>
+  </p:cSld>
+  <p:clrMapOvr>
+    <a:masterClrMapping/>
+  </p:clrMapOvr>
+</p:sld>
+</file>
+
+<file path=ppt/slides/slide20.xml><?xml version="1.0" encoding="utf-8"?>
+<p:sld xmlns:a="http://schemas.openxmlformats.org/drawingml/2006/main" xmlns:p="http://schemas.openxmlformats.org/presentationml/2006/main" xmlns:r="http://schemas.openxmlformats.org/officeDocument/2006/relationships">
+  <p:cSld>
+    <p:bg>
+      <p:bgPr>
+        <a:solidFill>
+          <a:srgbClr val="FFFFFF"/>
+        </a:solidFill>
+        <a:effectLst/>
+      </p:bgPr>
+    </p:bg>
+    <p:spTree>
+      <p:nvGrpSpPr>
+        <p:cNvPr id="1" name=""/>
+        <p:cNvGrpSpPr/>
+        <p:nvPr/>
+      </p:nvGrpSpPr>
+      <p:grpSpPr/>
+      <p:sp>
+        <p:nvSpPr>
+          <p:cNvPr id="2" name="TextBox 1"/>
+          <p:cNvSpPr txBox="1"/>
+          <p:nvPr/>
+        </p:nvSpPr>
+        <p:spPr>
+          <a:xfrm>
+            <a:off x="548640" y="274320"/>
+            <a:ext cx="11064240" cy="822960"/>
+          </a:xfrm>
+          <a:prstGeom prst="rect">
+            <a:avLst/>
+          </a:prstGeom>
+          <a:noFill/>
+        </p:spPr>
+        <p:txBody>
+          <a:bodyPr wrap="square">
+            <a:spAutoFit/>
+          </a:bodyPr>
+          <a:lstStyle/>
+          <a:p>
+            <a:r>
+              <a:rPr sz="3000" b="1" i="0">
+                <a:solidFill>
+                  <a:srgbClr val="2B6CB0"/>
+                </a:solidFill>
+                <a:latin typeface="Calibri"/>
+              </a:rPr>
+              <a:t>Activity 2</a:t>
+            </a:r>
+          </a:p>
+        </p:txBody>
+      </p:sp>
+      <p:sp>
+        <p:nvSpPr>
+          <p:cNvPr id="3" name="TextBox 2"/>
+          <p:cNvSpPr txBox="1"/>
+          <p:nvPr/>
+        </p:nvSpPr>
+        <p:spPr>
+          <a:xfrm>
+            <a:off x="640080" y="1280160"/>
+            <a:ext cx="10881360" cy="5120640"/>
+          </a:xfrm>
+          <a:prstGeom prst="rect">
+            <a:avLst/>
+          </a:prstGeom>
+          <a:noFill/>
+        </p:spPr>
+        <p:txBody>
+          <a:bodyPr wrap="square">
+            <a:spAutoFit/>
+          </a:bodyPr>
+          <a:lstStyle/>
+          <a:p>
+            <a:pPr/>
+            <a:r>
+              <a:rPr sz="2200" b="1">
+                <a:solidFill>
+                  <a:srgbClr val="2B6CB0"/>
+                </a:solidFill>
+                <a:latin typeface="Calibri"/>
+              </a:rPr>
+              <a:t>Representational or Generalisation? Card Sort  (15 min)</a:t>
+            </a:r>
+          </a:p>
+          <a:p>
+            <a:pPr lvl="1"/>
+            <a:r>
+              <a:rPr sz="2000" b="0">
+                <a:solidFill>
+                  <a:srgbClr val="222222"/>
+                </a:solidFill>
+                <a:latin typeface="Calibri"/>
+              </a:rPr>
+              <a:t>Pairs sort ten example cards under two headers: representational abstraction (remove detail from one specific thing) and generalisation (group many things by shared characteristics)</a:t>
+            </a:r>
+          </a:p>
+          <a:p>
+            <a:pPr lvl="1"/>
+            <a:r>
+              <a:rPr sz="2000" b="0">
+                <a:solidFill>
+                  <a:srgbClr val="222222"/>
+                </a:solidFill>
+                <a:latin typeface="Calibri"/>
+              </a:rPr>
+              <a:t>Cards: the Tube map; an Animal superclass for Dog, Cat, Horse; a road network as a graph of nodes and weighted edges; a Vehicle record for cars, vans and bikes; a weather model ignoring raindrops; savings and current accounts under one Account type; a game minimap; a Shape class with area() overridden by Circle and Square; a flight simulator's simplified physics; all customers as name, ID, balance</a:t>
+            </a:r>
+          </a:p>
+          <a:p>
+            <a:pPr lvl="1"/>
+            <a:r>
+              <a:rPr sz="2000" b="0">
+                <a:solidFill>
+                  <a:srgbClr val="222222"/>
+                </a:solidFill>
+                <a:latin typeface="Calibri"/>
+              </a:rPr>
+              <a:t>Pairs must write the test question they used to decide (one thing simplified, or many things grouped?)</a:t>
+            </a:r>
+          </a:p>
+          <a:p>
+            <a:pPr lvl="1"/>
+            <a:r>
+              <a:rPr sz="2000" b="0">
+                <a:solidFill>
+                  <a:srgbClr val="222222"/>
+                </a:solidFill>
+                <a:latin typeface="Calibri"/>
+              </a:rPr>
+              <a:t>Class check: representational = Tube map, road graph, weather model, minimap, simulator; generalisation = Animal, Vehicle, Account, Shape, customers</a:t>
+            </a:r>
+          </a:p>
+          <a:p>
+            <a:pPr lvl="1"/>
+            <a:r>
+              <a:rPr sz="2000" b="0">
+                <a:solidFill>
+                  <a:srgbClr val="222222"/>
+                </a:solidFill>
+                <a:latin typeface="Calibri"/>
+              </a:rPr>
+              <a:t>Pairs generate one new example of each type from a video game they know</a:t>
+            </a:r>
+          </a:p>
+          <a:p>
+            <a:pPr/>
+            <a:r>
+              <a:rPr sz="1800" b="0">
+                <a:solidFill>
+                  <a:srgbClr val="B76E00"/>
+                </a:solidFill>
+                <a:latin typeface="Calibri"/>
+              </a:rPr>
+              <a:t>Stretch: Identify a card that is arguably both (the road-network graph simplifies one map AND generalises places-plus-connections to any network) and defend the dual reading.</a:t>
+            </a:r>
+          </a:p>
+        </p:txBody>
+      </p:sp>
+    </p:spTree>
+  </p:cSld>
+  <p:clrMapOvr>
+    <a:masterClrMapping/>
+  </p:clrMapOvr>
+</p:sld>
+</file>
+
+<file path=ppt/slides/slide21.xml><?xml version="1.0" encoding="utf-8"?>
+<p:sld xmlns:a="http://schemas.openxmlformats.org/drawingml/2006/main" xmlns:p="http://schemas.openxmlformats.org/presentationml/2006/main" xmlns:r="http://schemas.openxmlformats.org/officeDocument/2006/relationships">
+  <p:cSld>
+    <p:bg>
+      <p:bgPr>
+        <a:solidFill>
+          <a:srgbClr val="FFFFFF"/>
+        </a:solidFill>
+        <a:effectLst/>
+      </p:bgPr>
+    </p:bg>
+    <p:spTree>
+      <p:nvGrpSpPr>
+        <p:cNvPr id="1" name=""/>
+        <p:cNvGrpSpPr/>
+        <p:nvPr/>
+      </p:nvGrpSpPr>
+      <p:grpSpPr/>
+      <p:sp>
+        <p:nvSpPr>
+          <p:cNvPr id="2" name="TextBox 1"/>
+          <p:cNvSpPr txBox="1"/>
+          <p:nvPr/>
+        </p:nvSpPr>
+        <p:spPr>
+          <a:xfrm>
+            <a:off x="548640" y="274320"/>
+            <a:ext cx="11064240" cy="822960"/>
+          </a:xfrm>
+          <a:prstGeom prst="rect">
+            <a:avLst/>
+          </a:prstGeom>
+          <a:noFill/>
+        </p:spPr>
+        <p:txBody>
+          <a:bodyPr wrap="square">
+            <a:spAutoFit/>
+          </a:bodyPr>
+          <a:lstStyle/>
+          <a:p>
+            <a:r>
+              <a:rPr sz="3000" b="1" i="0">
+                <a:solidFill>
+                  <a:srgbClr val="2B6CB0"/>
+                </a:solidFill>
+                <a:latin typeface="Calibri"/>
+              </a:rPr>
+              <a:t>Activity 3</a:t>
+            </a:r>
+          </a:p>
+        </p:txBody>
+      </p:sp>
+      <p:sp>
+        <p:nvSpPr>
+          <p:cNvPr id="3" name="TextBox 2"/>
+          <p:cNvSpPr txBox="1"/>
+          <p:nvPr/>
+        </p:nvSpPr>
+        <p:spPr>
+          <a:xfrm>
+            <a:off x="640080" y="1280160"/>
+            <a:ext cx="10881360" cy="5120640"/>
+          </a:xfrm>
+          <a:prstGeom prst="rect">
+            <a:avLst/>
+          </a:prstGeom>
+          <a:noFill/>
+        </p:spPr>
+        <p:txBody>
+          <a:bodyPr wrap="square">
+            <a:spAutoFit/>
+          </a:bodyPr>
+          <a:lstStyle/>
+          <a:p>
+            <a:pPr/>
+            <a:r>
+              <a:rPr sz="2200" b="1">
+                <a:solidFill>
+                  <a:srgbClr val="2B6CB0"/>
+                </a:solidFill>
+                <a:latin typeface="Calibri"/>
+              </a:rPr>
+              <a:t>Always, Sometimes, Never: Abstraction Claims  (15 min)</a:t>
+            </a:r>
+          </a:p>
+          <a:p>
+            <a:pPr lvl="1"/>
+            <a:r>
+              <a:rPr sz="2000" b="0">
+                <a:solidFill>
+                  <a:srgbClr val="222222"/>
+                </a:solidFill>
+                <a:latin typeface="Calibri"/>
+              </a:rPr>
+              <a:t>Give pairs seven statement slips: (a) an abstraction contains less detail than the real thing; (b) removing more detail makes an abstraction better; (c) abstraction and decomposition are the same skill; (d) two correct abstractions of the same thing can look completely different; (e) a model that leaves out relevant detail is a poor abstraction for that problem; (f) abstraction is only used in programming; (g) the Tube map is wrong because distances are not to scale</a:t>
+            </a:r>
+          </a:p>
+          <a:p>
+            <a:pPr lvl="1"/>
+            <a:r>
+              <a:rPr sz="2000" b="0">
+                <a:solidFill>
+                  <a:srgbClr val="222222"/>
+                </a:solidFill>
+                <a:latin typeface="Calibri"/>
+              </a:rPr>
+              <a:t>Pairs classify each as Always, Sometimes or Never with a one-line justification and an example</a:t>
+            </a:r>
+          </a:p>
+          <a:p>
+            <a:pPr lvl="1"/>
+            <a:r>
+              <a:rPr sz="2000" b="0">
+                <a:solidFill>
+                  <a:srgbClr val="222222"/>
+                </a:solidFill>
+                <a:latin typeface="Calibri"/>
+              </a:rPr>
+              <a:t>Pairs merge into fours; disagreements must be settled by constructing a counter-example</a:t>
+            </a:r>
+          </a:p>
+          <a:p>
+            <a:pPr lvl="1"/>
+            <a:r>
+              <a:rPr sz="2000" b="0">
+                <a:solidFill>
+                  <a:srgbClr val="222222"/>
+                </a:solidFill>
+                <a:latin typeface="Calibri"/>
+              </a:rPr>
+              <a:t>Debrief targeting (b) and (c), the two most commonly botched in exams</a:t>
+            </a:r>
+          </a:p>
+          <a:p>
+            <a:pPr lvl="1"/>
+            <a:r>
+              <a:rPr sz="2000" b="0">
+                <a:solidFill>
+                  <a:srgbClr val="222222"/>
+                </a:solidFill>
+                <a:latin typeface="Calibri"/>
+              </a:rPr>
+              <a:t>Answers: (a) Always; (b) Sometimes — remove a necessary detail and the model stops working; (c) Never — abstraction removes detail, decomposition splits into sub-problems; (d) Always possible — different purposes; (e) Always; (f) Never — maps, timetables, models everywhere; (g) Never — it is fit for its purpose, scale is the discarded detail</a:t>
+            </a:r>
+          </a:p>
+          <a:p>
+            <a:pPr/>
+            <a:r>
+              <a:rPr sz="1800" b="0">
+                <a:solidFill>
+                  <a:srgbClr val="B76E00"/>
+                </a:solidFill>
+                <a:latin typeface="Calibri"/>
+              </a:rPr>
+              <a:t>Stretch: Fours draft one new Sometimes statement whose truth hinges on the problem's purpose, and challenge another four.</a:t>
+            </a:r>
+          </a:p>
+        </p:txBody>
+      </p:sp>
+    </p:spTree>
+  </p:cSld>
+  <p:clrMapOvr>
+    <a:masterClrMapping/>
+  </p:clrMapOvr>
+</p:sld>
+</file>
+
+<file path=ppt/slides/slide22.xml><?xml version="1.0" encoding="utf-8"?>
+<p:sld xmlns:a="http://schemas.openxmlformats.org/drawingml/2006/main" xmlns:p="http://schemas.openxmlformats.org/presentationml/2006/main" xmlns:r="http://schemas.openxmlformats.org/officeDocument/2006/relationships">
+  <p:cSld>
+    <p:bg>
+      <p:bgPr>
+        <a:solidFill>
+          <a:srgbClr val="FFFFFF"/>
+        </a:solidFill>
+        <a:effectLst/>
+      </p:bgPr>
+    </p:bg>
+    <p:spTree>
+      <p:nvGrpSpPr>
+        <p:cNvPr id="1" name=""/>
+        <p:cNvGrpSpPr/>
+        <p:nvPr/>
+      </p:nvGrpSpPr>
+      <p:grpSpPr/>
+      <p:sp>
+        <p:nvSpPr>
+          <p:cNvPr id="2" name="TextBox 1"/>
+          <p:cNvSpPr txBox="1"/>
+          <p:nvPr/>
+        </p:nvSpPr>
+        <p:spPr>
+          <a:xfrm>
+            <a:off x="548640" y="274320"/>
+            <a:ext cx="11064240" cy="822960"/>
+          </a:xfrm>
+          <a:prstGeom prst="rect">
+            <a:avLst/>
+          </a:prstGeom>
+          <a:noFill/>
+        </p:spPr>
+        <p:txBody>
+          <a:bodyPr wrap="square">
+            <a:spAutoFit/>
+          </a:bodyPr>
+          <a:lstStyle/>
+          <a:p>
+            <a:r>
+              <a:rPr sz="3000" b="1" i="0">
+                <a:solidFill>
+                  <a:srgbClr val="2B6CB0"/>
+                </a:solidFill>
+                <a:latin typeface="Calibri"/>
+              </a:rPr>
+              <a:t>Practice (1-4)</a:t>
+            </a:r>
+          </a:p>
+        </p:txBody>
+      </p:sp>
+      <p:sp>
+        <p:nvSpPr>
+          <p:cNvPr id="3" name="TextBox 2"/>
+          <p:cNvSpPr txBox="1"/>
+          <p:nvPr/>
+        </p:nvSpPr>
+        <p:spPr>
+          <a:xfrm>
+            <a:off x="640080" y="1280160"/>
+            <a:ext cx="10881360" cy="5120640"/>
+          </a:xfrm>
+          <a:prstGeom prst="rect">
+            <a:avLst/>
+          </a:prstGeom>
+          <a:noFill/>
+        </p:spPr>
+        <p:txBody>
+          <a:bodyPr wrap="square">
+            <a:spAutoFit/>
+          </a:bodyPr>
+          <a:lstStyle/>
+          <a:p>
+            <a:r>
+              <a:rPr sz="2000" b="1">
+                <a:solidFill>
+                  <a:srgbClr val="222222"/>
+                </a:solidFill>
+                <a:latin typeface="Calibri"/>
+              </a:rPr>
+              <a:t>1. Define the term abstraction. [2]</a:t>
+            </a:r>
+          </a:p>
+          <a:p>
+            <a:r>
+              <a:rPr sz="2000" b="1">
+                <a:solidFill>
+                  <a:srgbClr val="222222"/>
+                </a:solidFill>
+                <a:latin typeface="Calibri"/>
+              </a:rPr>
+              <a:t>2. Explain one reason why abstraction is needed when developing software. [2]</a:t>
+            </a:r>
+          </a:p>
+          <a:p>
+            <a:r>
+              <a:rPr sz="2000" b="1">
+                <a:solidFill>
+                  <a:srgbClr val="222222"/>
+                </a:solidFill>
+                <a:latin typeface="Calibri"/>
+              </a:rPr>
+              <a:t>3. Describe the difference between representational abstraction and generalisation, giving an example of each. [4]</a:t>
+            </a:r>
+          </a:p>
+          <a:p>
+            <a:r>
+              <a:rPr sz="2000" b="1">
+                <a:solidFill>
+                  <a:srgbClr val="222222"/>
+                </a:solidFill>
+                <a:latin typeface="Calibri"/>
+              </a:rPr>
+              <a:t>4. A developer is creating a route-finding app. Describe how the real road network could be represented as an abstract model. [3]</a:t>
+            </a:r>
+          </a:p>
+        </p:txBody>
+      </p:sp>
+    </p:spTree>
+  </p:cSld>
+  <p:clrMapOvr>
+    <a:masterClrMapping/>
+  </p:clrMapOvr>
+</p:sld>
+</file>
+
+<file path=ppt/slides/slide23.xml><?xml version="1.0" encoding="utf-8"?>
+<p:sld xmlns:a="http://schemas.openxmlformats.org/drawingml/2006/main" xmlns:p="http://schemas.openxmlformats.org/presentationml/2006/main" xmlns:r="http://schemas.openxmlformats.org/officeDocument/2006/relationships">
+  <p:cSld>
+    <p:bg>
+      <p:bgPr>
+        <a:solidFill>
+          <a:srgbClr val="FFFFFF"/>
+        </a:solidFill>
+        <a:effectLst/>
+      </p:bgPr>
+    </p:bg>
+    <p:spTree>
+      <p:nvGrpSpPr>
+        <p:cNvPr id="1" name=""/>
+        <p:cNvGrpSpPr/>
+        <p:nvPr/>
+      </p:nvGrpSpPr>
+      <p:grpSpPr/>
+      <p:sp>
+        <p:nvSpPr>
+          <p:cNvPr id="2" name="TextBox 1"/>
+          <p:cNvSpPr txBox="1"/>
+          <p:nvPr/>
+        </p:nvSpPr>
+        <p:spPr>
+          <a:xfrm>
+            <a:off x="548640" y="274320"/>
+            <a:ext cx="11064240" cy="822960"/>
+          </a:xfrm>
+          <a:prstGeom prst="rect">
+            <a:avLst/>
+          </a:prstGeom>
+          <a:noFill/>
+        </p:spPr>
+        <p:txBody>
+          <a:bodyPr wrap="square">
+            <a:spAutoFit/>
+          </a:bodyPr>
+          <a:lstStyle/>
+          <a:p>
+            <a:r>
+              <a:rPr sz="3000" b="1" i="0">
+                <a:solidFill>
+                  <a:srgbClr val="2B6CB0"/>
+                </a:solidFill>
+                <a:latin typeface="Calibri"/>
+              </a:rPr>
+              <a:t>Practice — answers (1-4)</a:t>
+            </a:r>
+          </a:p>
+        </p:txBody>
+      </p:sp>
+      <p:sp>
+        <p:nvSpPr>
+          <p:cNvPr id="3" name="TextBox 2"/>
+          <p:cNvSpPr txBox="1"/>
+          <p:nvPr/>
+        </p:nvSpPr>
+        <p:spPr>
+          <a:xfrm>
+            <a:off x="640080" y="1280160"/>
+            <a:ext cx="10881360" cy="5120640"/>
+          </a:xfrm>
+          <a:prstGeom prst="rect">
+            <a:avLst/>
+          </a:prstGeom>
+          <a:noFill/>
+        </p:spPr>
+        <p:txBody>
+          <a:bodyPr wrap="square">
+            <a:spAutoFit/>
+          </a:bodyPr>
+          <a:lstStyle/>
+          <a:p>
+            <a:r>
+              <a:rPr sz="2000" b="1">
+                <a:solidFill>
+                  <a:srgbClr val="222222"/>
+                </a:solidFill>
+                <a:latin typeface="Calibri"/>
+              </a:rPr>
+              <a:t>1. Define the term abstraction. [2]</a:t>
+            </a:r>
+          </a:p>
+          <a:p>
+            <a:pPr lvl="1"/>
+            <a:r>
+              <a:rPr sz="1800" i="1">
+                <a:solidFill>
+                  <a:srgbClr val="B76E00"/>
+                </a:solidFill>
+                <a:latin typeface="Calibri"/>
+              </a:rPr>
+              <a:t>Answer: Removing or hiding unnecessary detail (1) so that only information relevant to the problem remains, giving a simpler model (1).</a:t>
+            </a:r>
+          </a:p>
+          <a:p>
+            <a:r>
+              <a:rPr sz="2000" b="1">
+                <a:solidFill>
+                  <a:srgbClr val="222222"/>
+                </a:solidFill>
+                <a:latin typeface="Calibri"/>
+              </a:rPr>
+              <a:t>2. Explain one reason why abstraction is needed when developing software. [2]</a:t>
+            </a:r>
+          </a:p>
+          <a:p>
+            <a:pPr lvl="1"/>
+            <a:r>
+              <a:rPr sz="1800" i="1">
+                <a:solidFill>
+                  <a:srgbClr val="B76E00"/>
+                </a:solidFill>
+                <a:latin typeface="Calibri"/>
+              </a:rPr>
+              <a:t>Answer: Real-world systems contain overwhelming amounts of detail (1); removing what is irrelevant makes the program simpler, faster to develop and easier to test and maintain (1).</a:t>
+            </a:r>
+          </a:p>
+          <a:p>
+            <a:r>
+              <a:rPr sz="2000" b="1">
+                <a:solidFill>
+                  <a:srgbClr val="222222"/>
+                </a:solidFill>
+                <a:latin typeface="Calibri"/>
+              </a:rPr>
+              <a:t>3. Describe the difference between representational abstraction and generalisation, giving an example of each. [4]</a:t>
+            </a:r>
+          </a:p>
+          <a:p>
+            <a:pPr lvl="1"/>
+            <a:r>
+              <a:rPr sz="1800" i="1">
+                <a:solidFill>
+                  <a:srgbClr val="B76E00"/>
+                </a:solidFill>
+                <a:latin typeface="Calibri"/>
+              </a:rPr>
+              <a:t>Answer: Representational abstraction simplifies one specific thing into a model of that problem (1), e.g. a road network stored as a graph of nodes and weighted edges, or the Tube map (1); generalisation groups many things by shared characteristics into one reusable model (1), e.g. savings and current accounts treated as a single Account type (1).</a:t>
+            </a:r>
+          </a:p>
+          <a:p>
+            <a:r>
+              <a:rPr sz="2000" b="1">
+                <a:solidFill>
+                  <a:srgbClr val="222222"/>
+                </a:solidFill>
+                <a:latin typeface="Calibri"/>
+              </a:rPr>
+              <a:t>4. A developer is creating a route-finding app. Describe how the real road network could be represented as an abstract model. [3]</a:t>
+            </a:r>
+          </a:p>
+          <a:p>
+            <a:pPr lvl="1"/>
+            <a:r>
+              <a:rPr sz="1800" i="1">
+                <a:solidFill>
+                  <a:srgbClr val="B76E00"/>
+                </a:solidFill>
+                <a:latin typeface="Calibri"/>
+              </a:rPr>
+              <a:t>Answer: Junctions and places become nodes (1); roads between them become edges weighted with distance or travel time (1); irrelevant detail such as scenery, buildings and the exact shapes of roads is discarded because it does not affect the choice of route (1).</a:t>
+            </a:r>
+          </a:p>
+        </p:txBody>
+      </p:sp>
+    </p:spTree>
+  </p:cSld>
+  <p:clrMapOvr>
+    <a:masterClrMapping/>
+  </p:clrMapOvr>
+</p:sld>
+</file>
+
+<file path=ppt/slides/slide24.xml><?xml version="1.0" encoding="utf-8"?>
+<p:sld xmlns:a="http://schemas.openxmlformats.org/drawingml/2006/main" xmlns:p="http://schemas.openxmlformats.org/presentationml/2006/main" xmlns:r="http://schemas.openxmlformats.org/officeDocument/2006/relationships">
+  <p:cSld>
+    <p:bg>
+      <p:bgPr>
+        <a:solidFill>
+          <a:srgbClr val="FFFFFF"/>
+        </a:solidFill>
+        <a:effectLst/>
+      </p:bgPr>
+    </p:bg>
+    <p:spTree>
+      <p:nvGrpSpPr>
+        <p:cNvPr id="1" name=""/>
+        <p:cNvGrpSpPr/>
+        <p:nvPr/>
+      </p:nvGrpSpPr>
+      <p:grpSpPr/>
+      <p:sp>
+        <p:nvSpPr>
+          <p:cNvPr id="2" name="TextBox 1"/>
+          <p:cNvSpPr txBox="1"/>
+          <p:nvPr/>
+        </p:nvSpPr>
+        <p:spPr>
+          <a:xfrm>
+            <a:off x="548640" y="274320"/>
+            <a:ext cx="11064240" cy="822960"/>
+          </a:xfrm>
+          <a:prstGeom prst="rect">
+            <a:avLst/>
+          </a:prstGeom>
+          <a:noFill/>
+        </p:spPr>
+        <p:txBody>
+          <a:bodyPr wrap="square">
+            <a:spAutoFit/>
+          </a:bodyPr>
+          <a:lstStyle/>
+          <a:p>
+            <a:r>
+              <a:rPr sz="3000" b="1" i="0">
+                <a:solidFill>
+                  <a:srgbClr val="2B6CB0"/>
+                </a:solidFill>
+                <a:latin typeface="Calibri"/>
+              </a:rPr>
+              <a:t>Practice (5-8)</a:t>
+            </a:r>
+          </a:p>
+        </p:txBody>
+      </p:sp>
+      <p:sp>
+        <p:nvSpPr>
+          <p:cNvPr id="3" name="TextBox 2"/>
+          <p:cNvSpPr txBox="1"/>
+          <p:nvPr/>
+        </p:nvSpPr>
+        <p:spPr>
+          <a:xfrm>
+            <a:off x="640080" y="1280160"/>
+            <a:ext cx="10881360" cy="5120640"/>
+          </a:xfrm>
+          <a:prstGeom prst="rect">
+            <a:avLst/>
+          </a:prstGeom>
+          <a:noFill/>
+        </p:spPr>
+        <p:txBody>
+          <a:bodyPr wrap="square">
+            <a:spAutoFit/>
+          </a:bodyPr>
+          <a:lstStyle/>
+          <a:p>
+            <a:r>
+              <a:rPr sz="2000" b="1">
+                <a:solidFill>
+                  <a:srgbClr val="222222"/>
+                </a:solidFill>
+                <a:latin typeface="Calibri"/>
+              </a:rPr>
+              <a:t>1. A program models a library member for a book-loans system. State two pieces of data the model should keep and two details of the real person it should discard, justifying the discards. [4]</a:t>
+            </a:r>
+          </a:p>
+          <a:p>
+            <a:r>
+              <a:rPr sz="2000" b="1">
+                <a:solidFill>
+                  <a:srgbClr val="222222"/>
+                </a:solidFill>
+                <a:latin typeface="Calibri"/>
+              </a:rPr>
+              <a:t>2. The London Underground map does not show true distances or geography. Explain why it is still a good abstraction. [3]</a:t>
+            </a:r>
+          </a:p>
+          <a:p>
+            <a:r>
+              <a:rPr sz="2000" b="1">
+                <a:solidFill>
+                  <a:srgbClr val="222222"/>
+                </a:solidFill>
+                <a:latin typeface="Calibri"/>
+              </a:rPr>
+              <a:t>3. A student says that abstraction means breaking a problem down into smaller sub-problems. Explain why the student is wrong. [2]</a:t>
+            </a:r>
+          </a:p>
+          <a:p>
+            <a:r>
+              <a:rPr sz="2000" b="1">
+                <a:solidFill>
+                  <a:srgbClr val="222222"/>
+                </a:solidFill>
+                <a:latin typeface="Calibri"/>
+              </a:rPr>
+              <a:t>4. A bank replaces separate savings-account and current-account code with a single generalised Account model. Explain two benefits of this generalisation. [4]</a:t>
+            </a:r>
+          </a:p>
+        </p:txBody>
+      </p:sp>
+    </p:spTree>
+  </p:cSld>
+  <p:clrMapOvr>
+    <a:masterClrMapping/>
+  </p:clrMapOvr>
+</p:sld>
+</file>
+
+<file path=ppt/slides/slide25.xml><?xml version="1.0" encoding="utf-8"?>
+<p:sld xmlns:a="http://schemas.openxmlformats.org/drawingml/2006/main" xmlns:p="http://schemas.openxmlformats.org/presentationml/2006/main" xmlns:r="http://schemas.openxmlformats.org/officeDocument/2006/relationships">
+  <p:cSld>
+    <p:bg>
+      <p:bgPr>
+        <a:solidFill>
+          <a:srgbClr val="FFFFFF"/>
+        </a:solidFill>
+        <a:effectLst/>
+      </p:bgPr>
+    </p:bg>
+    <p:spTree>
+      <p:nvGrpSpPr>
+        <p:cNvPr id="1" name=""/>
+        <p:cNvGrpSpPr/>
+        <p:nvPr/>
+      </p:nvGrpSpPr>
+      <p:grpSpPr/>
+      <p:sp>
+        <p:nvSpPr>
+          <p:cNvPr id="2" name="TextBox 1"/>
+          <p:cNvSpPr txBox="1"/>
+          <p:nvPr/>
+        </p:nvSpPr>
+        <p:spPr>
+          <a:xfrm>
+            <a:off x="548640" y="274320"/>
+            <a:ext cx="11064240" cy="822960"/>
+          </a:xfrm>
+          <a:prstGeom prst="rect">
+            <a:avLst/>
+          </a:prstGeom>
+          <a:noFill/>
+        </p:spPr>
+        <p:txBody>
+          <a:bodyPr wrap="square">
+            <a:spAutoFit/>
+          </a:bodyPr>
+          <a:lstStyle/>
+          <a:p>
+            <a:r>
+              <a:rPr sz="3000" b="1" i="0">
+                <a:solidFill>
+                  <a:srgbClr val="2B6CB0"/>
+                </a:solidFill>
+                <a:latin typeface="Calibri"/>
+              </a:rPr>
+              <a:t>Practice — answers (5-8)</a:t>
+            </a:r>
+          </a:p>
+        </p:txBody>
+      </p:sp>
+      <p:sp>
+        <p:nvSpPr>
+          <p:cNvPr id="3" name="TextBox 2"/>
+          <p:cNvSpPr txBox="1"/>
+          <p:nvPr/>
+        </p:nvSpPr>
+        <p:spPr>
+          <a:xfrm>
+            <a:off x="640080" y="1280160"/>
+            <a:ext cx="10881360" cy="5120640"/>
+          </a:xfrm>
+          <a:prstGeom prst="rect">
+            <a:avLst/>
+          </a:prstGeom>
+          <a:noFill/>
+        </p:spPr>
+        <p:txBody>
+          <a:bodyPr wrap="square">
+            <a:spAutoFit/>
+          </a:bodyPr>
+          <a:lstStyle/>
+          <a:p>
+            <a:r>
+              <a:rPr sz="2000" b="1">
+                <a:solidFill>
+                  <a:srgbClr val="222222"/>
+                </a:solidFill>
+                <a:latin typeface="Calibri"/>
+              </a:rPr>
+              <a:t>1. A program models a library member for a book-loans system. State two pieces of data the model should keep and two details of the real person it should discard, justifying the discards. [4]</a:t>
+            </a:r>
+          </a:p>
+          <a:p>
+            <a:pPr lvl="1"/>
+            <a:r>
+              <a:rPr sz="1800" i="1">
+                <a:solidFill>
+                  <a:srgbClr val="B76E00"/>
+                </a:solidFill>
+                <a:latin typeface="Calibri"/>
+              </a:rPr>
+              <a:t>Answer: Keep: member ID/name and contact details, plus current loans/due dates (1 for two sensible items); these are needed to record and chase loans (1). Discard: e.g. hair colour and favourite author (1); neither affects recording or returning loans, so they add complexity without value (1).</a:t>
+            </a:r>
+          </a:p>
+          <a:p>
+            <a:r>
+              <a:rPr sz="2000" b="1">
+                <a:solidFill>
+                  <a:srgbClr val="222222"/>
+                </a:solidFill>
+                <a:latin typeface="Calibri"/>
+              </a:rPr>
+              <a:t>2. The London Underground map does not show true distances or geography. Explain why it is still a good abstraction. [3]</a:t>
+            </a:r>
+          </a:p>
+          <a:p>
+            <a:pPr lvl="1"/>
+            <a:r>
+              <a:rPr sz="1800" i="1">
+                <a:solidFill>
+                  <a:srgbClr val="B76E00"/>
+                </a:solidFill>
+                <a:latin typeface="Calibri"/>
+              </a:rPr>
+              <a:t>Answer: Its purpose is to help passengers plan which lines to take and where to change (1); it keeps the relevant detail — lines, station order and interchanges (1) — and discards geography and scale, which do not affect that decision, making it clearer to use (1).</a:t>
+            </a:r>
+          </a:p>
+          <a:p>
+            <a:r>
+              <a:rPr sz="2000" b="1">
+                <a:solidFill>
+                  <a:srgbClr val="222222"/>
+                </a:solidFill>
+                <a:latin typeface="Calibri"/>
+              </a:rPr>
+              <a:t>3. A student says that abstraction means breaking a problem down into smaller sub-problems. Explain why the student is wrong. [2]</a:t>
+            </a:r>
+          </a:p>
+          <a:p>
+            <a:pPr lvl="1"/>
+            <a:r>
+              <a:rPr sz="1800" i="1">
+                <a:solidFill>
+                  <a:srgbClr val="B76E00"/>
+                </a:solidFill>
+                <a:latin typeface="Calibri"/>
+              </a:rPr>
+              <a:t>Answer: Breaking a problem into sub-problems is decomposition, a different computational thinking skill (1); abstraction is removing or hiding detail irrelevant to the problem to produce a simpler model (1).</a:t>
+            </a:r>
+          </a:p>
+          <a:p>
+            <a:r>
+              <a:rPr sz="2000" b="1">
+                <a:solidFill>
+                  <a:srgbClr val="222222"/>
+                </a:solidFill>
+                <a:latin typeface="Calibri"/>
+              </a:rPr>
+              <a:t>4. A bank replaces separate savings-account and current-account code with a single generalised Account model. Explain two benefits of this generalisation. [4]</a:t>
+            </a:r>
+          </a:p>
+          <a:p>
+            <a:pPr lvl="1"/>
+            <a:r>
+              <a:rPr sz="1800" i="1">
+                <a:solidFill>
+                  <a:srgbClr val="B76E00"/>
+                </a:solidFill>
+                <a:latin typeface="Calibri"/>
+              </a:rPr>
+              <a:t>Answer: Shared behaviour (deposit, withdraw, check balance) is written once instead of twice, reducing code size and the chance of inconsistent bugs (1) and making maintenance easier since fixes apply everywhere (1); the system is easier to extend, because a new account type can reuse the existing model rather than needing new code from scratch (1), cutting development time and testing effort (1).</a:t>
+            </a:r>
+          </a:p>
+        </p:txBody>
+      </p:sp>
+    </p:spTree>
+  </p:cSld>
+  <p:clrMapOvr>
+    <a:masterClrMapping/>
+  </p:clrMapOvr>
+</p:sld>
+</file>
+
+<file path=ppt/slides/slide26.xml><?xml version="1.0" encoding="utf-8"?>
+<p:sld xmlns:a="http://schemas.openxmlformats.org/drawingml/2006/main" xmlns:p="http://schemas.openxmlformats.org/presentationml/2006/main" xmlns:r="http://schemas.openxmlformats.org/officeDocument/2006/relationships">
+  <p:cSld>
+    <p:bg>
+      <p:bgPr>
+        <a:solidFill>
+          <a:srgbClr val="FFFFFF"/>
+        </a:solidFill>
+        <a:effectLst/>
+      </p:bgPr>
+    </p:bg>
+    <p:spTree>
+      <p:nvGrpSpPr>
+        <p:cNvPr id="1" name=""/>
+        <p:cNvGrpSpPr/>
+        <p:nvPr/>
+      </p:nvGrpSpPr>
+      <p:grpSpPr/>
+      <p:sp>
+        <p:nvSpPr>
+          <p:cNvPr id="2" name="TextBox 1"/>
+          <p:cNvSpPr txBox="1"/>
+          <p:nvPr/>
+        </p:nvSpPr>
+        <p:spPr>
+          <a:xfrm>
+            <a:off x="548640" y="274320"/>
+            <a:ext cx="11064240" cy="822960"/>
+          </a:xfrm>
+          <a:prstGeom prst="rect">
+            <a:avLst/>
+          </a:prstGeom>
+          <a:noFill/>
+        </p:spPr>
+        <p:txBody>
+          <a:bodyPr wrap="square">
+            <a:spAutoFit/>
+          </a:bodyPr>
+          <a:lstStyle/>
+          <a:p>
+            <a:r>
+              <a:rPr sz="3000" b="1" i="0">
+                <a:solidFill>
+                  <a:srgbClr val="2B6CB0"/>
+                </a:solidFill>
+                <a:latin typeface="Calibri"/>
+              </a:rPr>
+              <a:t>Common misconceptions</a:t>
+            </a:r>
+          </a:p>
+        </p:txBody>
+      </p:sp>
+      <p:sp>
+        <p:nvSpPr>
+          <p:cNvPr id="3" name="TextBox 2"/>
+          <p:cNvSpPr txBox="1"/>
+          <p:nvPr/>
+        </p:nvSpPr>
+        <p:spPr>
+          <a:xfrm>
+            <a:off x="640080" y="1280160"/>
+            <a:ext cx="10881360" cy="5120640"/>
+          </a:xfrm>
+          <a:prstGeom prst="rect">
+            <a:avLst/>
+          </a:prstGeom>
+          <a:noFill/>
+        </p:spPr>
+        <p:txBody>
+          <a:bodyPr wrap="square">
+            <a:spAutoFit/>
+          </a:bodyPr>
+          <a:lstStyle/>
+          <a:p>
+            <a:pPr/>
+            <a:r>
+              <a:rPr sz="2000" b="0">
+                <a:solidFill>
+                  <a:srgbClr val="222222"/>
+                </a:solidFill>
+                <a:latin typeface="Calibri"/>
+              </a:rPr>
+              <a:t>✗ Students often think abstraction and decomposition are the same, but abstraction removes detail while decomposition splits a problem into sub-problems.</a:t>
+            </a:r>
+          </a:p>
+          <a:p>
+            <a:pPr/>
+            <a:r>
+              <a:rPr sz="2000" b="0">
+                <a:solidFill>
+                  <a:srgbClr val="222222"/>
+                </a:solidFill>
+                <a:latin typeface="Calibri"/>
+              </a:rPr>
+              <a:t>✗ Students often think removing more detail always improves a model, but removing a necessary detail stops the model solving its problem.</a:t>
+            </a:r>
+          </a:p>
+          <a:p>
+            <a:pPr/>
+            <a:r>
+              <a:rPr sz="2000" b="0">
+                <a:solidFill>
+                  <a:srgbClr val="222222"/>
+                </a:solidFill>
+                <a:latin typeface="Calibri"/>
+              </a:rPr>
+              <a:t>✗ Students often think the Tube map is a wrong or bad map, but a model is judged against its purpose, and scale is the deliberately discarded detail.</a:t>
+            </a:r>
+          </a:p>
+          <a:p>
+            <a:pPr/>
+            <a:r>
+              <a:rPr sz="2000" b="0">
+                <a:solidFill>
+                  <a:srgbClr val="222222"/>
+                </a:solidFill>
+                <a:latin typeface="Calibri"/>
+              </a:rPr>
+              <a:t>✗ Students often define abstraction instead of applying it; exam marks come from naming scenario-specific details kept and discarded, with justification.</a:t>
+            </a:r>
+          </a:p>
+          <a:p>
+            <a:pPr/>
+            <a:r>
+              <a:rPr sz="2000" b="0">
+                <a:solidFill>
+                  <a:srgbClr val="222222"/>
+                </a:solidFill>
+                <a:latin typeface="Calibri"/>
+              </a:rPr>
+              <a:t>✗ Students often think abstraction only happens in code, but maps, timetables and physics models are everyday abstractions.</a:t>
+            </a:r>
+          </a:p>
+        </p:txBody>
+      </p:sp>
+    </p:spTree>
+  </p:cSld>
+  <p:clrMapOvr>
+    <a:masterClrMapping/>
+  </p:clrMapOvr>
+</p:sld>
+</file>
+
+<file path=ppt/slides/slide27.xml><?xml version="1.0" encoding="utf-8"?>
+<p:sld xmlns:a="http://schemas.openxmlformats.org/drawingml/2006/main" xmlns:p="http://schemas.openxmlformats.org/presentationml/2006/main" xmlns:r="http://schemas.openxmlformats.org/officeDocument/2006/relationships">
+  <p:cSld>
+    <p:bg>
+      <p:bgPr>
+        <a:solidFill>
+          <a:srgbClr val="FFFFFF"/>
+        </a:solidFill>
+        <a:effectLst/>
+      </p:bgPr>
+    </p:bg>
+    <p:spTree>
+      <p:nvGrpSpPr>
+        <p:cNvPr id="1" name=""/>
+        <p:cNvGrpSpPr/>
+        <p:nvPr/>
+      </p:nvGrpSpPr>
+      <p:grpSpPr/>
+      <p:sp>
+        <p:nvSpPr>
+          <p:cNvPr id="2" name="TextBox 1"/>
+          <p:cNvSpPr txBox="1"/>
+          <p:nvPr/>
+        </p:nvSpPr>
+        <p:spPr>
+          <a:xfrm>
+            <a:off x="548640" y="274320"/>
+            <a:ext cx="11064240" cy="822960"/>
+          </a:xfrm>
+          <a:prstGeom prst="rect">
+            <a:avLst/>
+          </a:prstGeom>
+          <a:noFill/>
+        </p:spPr>
+        <p:txBody>
+          <a:bodyPr wrap="square">
+            <a:spAutoFit/>
+          </a:bodyPr>
+          <a:lstStyle/>
+          <a:p>
+            <a:r>
+              <a:rPr sz="3000" b="1" i="0">
+                <a:solidFill>
+                  <a:srgbClr val="2B6CB0"/>
+                </a:solidFill>
+                <a:latin typeface="Calibri"/>
+              </a:rPr>
+              <a:t>How the exam asks this</a:t>
+            </a:r>
+          </a:p>
+        </p:txBody>
+      </p:sp>
+      <p:sp>
+        <p:nvSpPr>
+          <p:cNvPr id="3" name="TextBox 2"/>
+          <p:cNvSpPr txBox="1"/>
+          <p:nvPr/>
+        </p:nvSpPr>
+        <p:spPr>
+          <a:xfrm>
+            <a:off x="640080" y="1280160"/>
+            <a:ext cx="10881360" cy="5120640"/>
+          </a:xfrm>
+          <a:prstGeom prst="rect">
+            <a:avLst/>
+          </a:prstGeom>
+          <a:noFill/>
+        </p:spPr>
+        <p:txBody>
+          <a:bodyPr wrap="square">
+            <a:spAutoFit/>
+          </a:bodyPr>
+          <a:lstStyle/>
+          <a:p>
+            <a:pPr/>
+            <a:r>
+              <a:rPr sz="2000" b="0">
+                <a:solidFill>
+                  <a:srgbClr val="222222"/>
+                </a:solidFill>
+                <a:latin typeface="Calibri"/>
+              </a:rPr>
+              <a:t>Command words: Define/State (2 marks), Describe (a model for a scenario, 3-4 marks), Explain (why abstraction helps here, 2-4 marks), Discuss (use of abstraction across a whole system, up to 9-mark levels of response).</a:t>
+            </a:r>
+          </a:p>
+          <a:p>
+            <a:pPr/>
+            <a:r>
+              <a:rPr sz="2000" b="0">
+                <a:solidFill>
+                  <a:srgbClr val="222222"/>
+                </a:solidFill>
+                <a:latin typeface="Calibri"/>
+              </a:rPr>
+              <a:t>Application beats recitation: examiners give scenario marks for named details kept and discarded WITH justification, not for a memorised definition alone.</a:t>
+            </a:r>
+          </a:p>
+          <a:p>
+            <a:pPr/>
+            <a:r>
+              <a:rPr sz="2000" b="0">
+                <a:solidFill>
+                  <a:srgbClr val="222222"/>
+                </a:solidFill>
+                <a:latin typeface="Calibri"/>
+              </a:rPr>
+              <a:t>Example stem: 'A developer is writing a fitness-tracking app. Describe how abstraction will have been used in the design of the app.' — answer with specific kept/discarded data.</a:t>
+            </a:r>
+          </a:p>
+          <a:p>
+            <a:pPr/>
+            <a:r>
+              <a:rPr sz="2000" b="0">
+                <a:solidFill>
+                  <a:srgbClr val="222222"/>
+                </a:solidFill>
+                <a:latin typeface="Calibri"/>
+              </a:rPr>
+              <a:t>The abstraction/decomposition mix-up is an established trap; one sentence distinguishing them can secure a mark.</a:t>
+            </a:r>
+          </a:p>
+        </p:txBody>
+      </p:sp>
+    </p:spTree>
+  </p:cSld>
+  <p:clrMapOvr>
+    <a:masterClrMapping/>
+  </p:clrMapOvr>
+</p:sld>
+</file>
+
+<file path=ppt/slides/slide28.xml><?xml version="1.0" encoding="utf-8"?>
+<p:sld xmlns:a="http://schemas.openxmlformats.org/drawingml/2006/main" xmlns:p="http://schemas.openxmlformats.org/presentationml/2006/main" xmlns:r="http://schemas.openxmlformats.org/officeDocument/2006/relationships">
+  <p:cSld>
+    <p:bg>
+      <p:bgPr>
+        <a:solidFill>
+          <a:srgbClr val="FFFFFF"/>
+        </a:solidFill>
+        <a:effectLst/>
+      </p:bgPr>
+    </p:bg>
+    <p:spTree>
+      <p:nvGrpSpPr>
+        <p:cNvPr id="1" name=""/>
+        <p:cNvGrpSpPr/>
+        <p:nvPr/>
+      </p:nvGrpSpPr>
+      <p:grpSpPr/>
+      <p:sp>
+        <p:nvSpPr>
+          <p:cNvPr id="2" name="TextBox 1"/>
+          <p:cNvSpPr txBox="1"/>
+          <p:nvPr/>
+        </p:nvSpPr>
+        <p:spPr>
+          <a:xfrm>
+            <a:off x="548640" y="274320"/>
+            <a:ext cx="11064240" cy="822960"/>
+          </a:xfrm>
+          <a:prstGeom prst="rect">
+            <a:avLst/>
+          </a:prstGeom>
+          <a:noFill/>
+        </p:spPr>
+        <p:txBody>
+          <a:bodyPr wrap="square">
+            <a:spAutoFit/>
+          </a:bodyPr>
+          <a:lstStyle/>
+          <a:p>
+            <a:r>
+              <a:rPr sz="3000" b="1" i="0">
+                <a:solidFill>
+                  <a:srgbClr val="2B6CB0"/>
+                </a:solidFill>
+                <a:latin typeface="Calibri"/>
+              </a:rPr>
+              <a:t>Your turn</a:t>
+            </a:r>
+          </a:p>
+        </p:txBody>
+      </p:sp>
+      <p:sp>
+        <p:nvSpPr>
+          <p:cNvPr id="3" name="TextBox 2"/>
+          <p:cNvSpPr txBox="1"/>
+          <p:nvPr/>
+        </p:nvSpPr>
+        <p:spPr>
+          <a:xfrm>
+            <a:off x="640080" y="1280160"/>
+            <a:ext cx="10881360" cy="5120640"/>
+          </a:xfrm>
+          <a:prstGeom prst="rect">
+            <a:avLst/>
+          </a:prstGeom>
+          <a:noFill/>
+        </p:spPr>
+        <p:txBody>
+          <a:bodyPr wrap="square">
+            <a:spAutoFit/>
+          </a:bodyPr>
+          <a:lstStyle/>
+          <a:p>
+            <a:pPr/>
+            <a:r>
+              <a:rPr sz="2400" b="1">
+                <a:solidFill>
+                  <a:srgbClr val="2B6CB0"/>
+                </a:solidFill>
+                <a:latin typeface="Calibri"/>
+              </a:rPr>
+              <a:t>Task</a:t>
+            </a:r>
+          </a:p>
+          <a:p>
+            <a:pPr lvl="1"/>
+            <a:r>
+              <a:rPr sz="2200" b="0">
+                <a:solidFill>
+                  <a:srgbClr val="222222"/>
+                </a:solidFill>
+                <a:latin typeface="Calibri"/>
+              </a:rPr>
+              <a:t>Devise an abstract model for a school parents-evening booking system. List at least four pieces of data to keep and four real-world details to discard, justify every discard against the booking problem, and state whether your teacher and parent records are representational abstraction or generalisation, and why.</a:t>
+            </a:r>
+          </a:p>
+          <a:p>
+            <a:r>
+              <a:rPr sz="2400" b="1">
+                <a:solidFill>
+                  <a:srgbClr val="B76E00"/>
+                </a:solidFill>
+                <a:latin typeface="Calibri"/>
+              </a:rPr>
+              <a:t>Challenge / stretch</a:t>
+            </a:r>
+          </a:p>
+          <a:p>
+            <a:pPr lvl="1"/>
+            <a:r>
+              <a:rPr sz="2200" b="0">
+                <a:solidFill>
+                  <a:srgbClr val="222222"/>
+                </a:solidFill>
+                <a:latin typeface="Calibri"/>
+              </a:rPr>
+              <a:t>Take your parents-evening model and change the problem to fire-safety roll call during an evacuation of the event. Write down which discarded details must now return, which kept details become irrelevant, and one sentence explaining what this shows about abstraction being relative to purpose.</a:t>
+            </a:r>
+          </a:p>
+        </p:txBody>
+      </p:sp>
+    </p:spTree>
+  </p:cSld>
+  <p:clrMapOvr>
+    <a:masterClrMapping/>
+  </p:clrMapOvr>
+</p:sld>
+</file>
+
+<file path=ppt/slides/slide29.xml><?xml version="1.0" encoding="utf-8"?>
+<p:sld xmlns:a="http://schemas.openxmlformats.org/drawingml/2006/main" xmlns:p="http://schemas.openxmlformats.org/presentationml/2006/main" xmlns:r="http://schemas.openxmlformats.org/officeDocument/2006/relationships">
+  <p:cSld>
+    <p:bg>
+      <p:bgPr>
+        <a:solidFill>
+          <a:srgbClr val="FFFFFF"/>
+        </a:solidFill>
+        <a:effectLst/>
+      </p:bgPr>
+    </p:bg>
+    <p:spTree>
+      <p:nvGrpSpPr>
+        <p:cNvPr id="1" name=""/>
+        <p:cNvGrpSpPr/>
+        <p:nvPr/>
+      </p:nvGrpSpPr>
+      <p:grpSpPr/>
+      <p:sp>
+        <p:nvSpPr>
+          <p:cNvPr id="2" name="TextBox 1"/>
+          <p:cNvSpPr txBox="1"/>
+          <p:nvPr/>
+        </p:nvSpPr>
+        <p:spPr>
+          <a:xfrm>
+            <a:off x="548640" y="274320"/>
+            <a:ext cx="11064240" cy="822960"/>
+          </a:xfrm>
+          <a:prstGeom prst="rect">
+            <a:avLst/>
+          </a:prstGeom>
+          <a:noFill/>
+        </p:spPr>
+        <p:txBody>
+          <a:bodyPr wrap="square">
+            <a:spAutoFit/>
+          </a:bodyPr>
+          <a:lstStyle/>
+          <a:p>
+            <a:r>
+              <a:rPr sz="3000" b="1" i="0">
+                <a:solidFill>
+                  <a:srgbClr val="2B6CB0"/>
+                </a:solidFill>
+                <a:latin typeface="Calibri"/>
+              </a:rPr>
+              <a:t>Exit ticket</a:t>
+            </a:r>
+          </a:p>
+        </p:txBody>
+      </p:sp>
+      <p:sp>
+        <p:nvSpPr>
+          <p:cNvPr id="3" name="TextBox 2"/>
+          <p:cNvSpPr txBox="1"/>
+          <p:nvPr/>
+        </p:nvSpPr>
+        <p:spPr>
+          <a:xfrm>
+            <a:off x="640080" y="1280160"/>
+            <a:ext cx="10881360" cy="5120640"/>
+          </a:xfrm>
+          <a:prstGeom prst="rect">
+            <a:avLst/>
+          </a:prstGeom>
+          <a:noFill/>
+        </p:spPr>
+        <p:txBody>
+          <a:bodyPr wrap="square">
+            <a:spAutoFit/>
+          </a:bodyPr>
+          <a:lstStyle/>
+          <a:p>
+            <a:r>
+              <a:rPr sz="2200" b="1">
+                <a:solidFill>
+                  <a:srgbClr val="222222"/>
+                </a:solidFill>
+                <a:latin typeface="Calibri"/>
+              </a:rPr>
+              <a:t>1. In one sentence, what is abstraction?</a:t>
+            </a:r>
+          </a:p>
+          <a:p>
+            <a:r>
+              <a:rPr sz="2200" b="1">
+                <a:solidFill>
+                  <a:srgbClr val="222222"/>
+                </a:solidFill>
+                <a:latin typeface="Calibri"/>
+              </a:rPr>
+              <a:t>2. Give the test question that separates representational abstraction from generalisation.</a:t>
+            </a:r>
+          </a:p>
+          <a:p>
+            <a:r>
+              <a:rPr sz="2200" b="1">
+                <a:solidFill>
+                  <a:srgbClr val="222222"/>
+                </a:solidFill>
+                <a:latin typeface="Calibri"/>
+              </a:rPr>
+              <a:t>3. How is abstraction different from decomposition?</a:t>
             </a:r>
           </a:p>
         </p:txBody>
@@ -4092,7 +6348,7 @@
                 </a:solidFill>
                 <a:latin typeface="Calibri"/>
               </a:rPr>
-              <a:t>1. What does abstraction remove or hide from a problem?</a:t>
+              <a:t>1. From 1.1.1: describe the first two steps of the fetch stage, naming the registers.</a:t>
             </a:r>
           </a:p>
           <a:p>
@@ -4103,7 +6359,7 @@
                 </a:solidFill>
                 <a:latin typeface="Calibri"/>
               </a:rPr>
-              <a:t>2. Name the two types of abstraction in 2.1.1.</a:t>
+              <a:t>2. From 1.1.1: state the key difference between Von Neumann and Harvard architecture.</a:t>
             </a:r>
           </a:p>
           <a:p>
@@ -4114,7 +6370,7 @@
                 </a:solidFill>
                 <a:latin typeface="Calibri"/>
               </a:rPr>
-              <a:t>3. How does abstraction differ from decomposition?</a:t>
+              <a:t>3. From 1.1.1: a CPU has a 16-bit address bus. How many locations can it address?</a:t>
             </a:r>
           </a:p>
           <a:p>
@@ -4125,7 +6381,7 @@
                 </a:solidFill>
                 <a:latin typeface="Calibri"/>
               </a:rPr>
-              <a:t>4. Interleaving (2.1.3): what is decomposition?</a:t>
+              <a:t>4. From 1.1.2: which RISC feature makes pipelining easier, and why?</a:t>
             </a:r>
           </a:p>
           <a:p>
@@ -4136,7 +6392,159 @@
                 </a:solidFill>
                 <a:latin typeface="Calibri"/>
               </a:rPr>
-              <a:t>5. Interleaving (2.1.2): why might a satnav cache a computed route?</a:t>
+              <a:t>5. From 1.1.2: what is GPGPU?</a:t>
+            </a:r>
+          </a:p>
+        </p:txBody>
+      </p:sp>
+    </p:spTree>
+  </p:cSld>
+  <p:clrMapOvr>
+    <a:masterClrMapping/>
+  </p:clrMapOvr>
+</p:sld>
+</file>
+
+<file path=ppt/slides/slide30.xml><?xml version="1.0" encoding="utf-8"?>
+<p:sld xmlns:a="http://schemas.openxmlformats.org/drawingml/2006/main" xmlns:p="http://schemas.openxmlformats.org/presentationml/2006/main" xmlns:r="http://schemas.openxmlformats.org/officeDocument/2006/relationships">
+  <p:cSld>
+    <p:bg>
+      <p:bgPr>
+        <a:solidFill>
+          <a:srgbClr val="FFFFFF"/>
+        </a:solidFill>
+        <a:effectLst/>
+      </p:bgPr>
+    </p:bg>
+    <p:spTree>
+      <p:nvGrpSpPr>
+        <p:cNvPr id="1" name=""/>
+        <p:cNvGrpSpPr/>
+        <p:nvPr/>
+      </p:nvGrpSpPr>
+      <p:grpSpPr/>
+      <p:sp>
+        <p:nvSpPr>
+          <p:cNvPr id="2" name="TextBox 1"/>
+          <p:cNvSpPr txBox="1"/>
+          <p:nvPr/>
+        </p:nvSpPr>
+        <p:spPr>
+          <a:xfrm>
+            <a:off x="548640" y="274320"/>
+            <a:ext cx="11064240" cy="822960"/>
+          </a:xfrm>
+          <a:prstGeom prst="rect">
+            <a:avLst/>
+          </a:prstGeom>
+          <a:noFill/>
+        </p:spPr>
+        <p:txBody>
+          <a:bodyPr wrap="square">
+            <a:spAutoFit/>
+          </a:bodyPr>
+          <a:lstStyle/>
+          <a:p>
+            <a:r>
+              <a:rPr sz="3000" b="1" i="0">
+                <a:solidFill>
+                  <a:srgbClr val="2B6CB0"/>
+                </a:solidFill>
+                <a:latin typeface="Calibri"/>
+              </a:rPr>
+              <a:t>Exit ticket — answers</a:t>
+            </a:r>
+          </a:p>
+        </p:txBody>
+      </p:sp>
+      <p:sp>
+        <p:nvSpPr>
+          <p:cNvPr id="3" name="TextBox 2"/>
+          <p:cNvSpPr txBox="1"/>
+          <p:nvPr/>
+        </p:nvSpPr>
+        <p:spPr>
+          <a:xfrm>
+            <a:off x="640080" y="1280160"/>
+            <a:ext cx="10881360" cy="5120640"/>
+          </a:xfrm>
+          <a:prstGeom prst="rect">
+            <a:avLst/>
+          </a:prstGeom>
+          <a:noFill/>
+        </p:spPr>
+        <p:txBody>
+          <a:bodyPr wrap="square">
+            <a:spAutoFit/>
+          </a:bodyPr>
+          <a:lstStyle/>
+          <a:p>
+            <a:r>
+              <a:rPr sz="2200" b="1">
+                <a:solidFill>
+                  <a:srgbClr val="222222"/>
+                </a:solidFill>
+                <a:latin typeface="Calibri"/>
+              </a:rPr>
+              <a:t>1. In one sentence, what is abstraction?</a:t>
+            </a:r>
+          </a:p>
+          <a:p>
+            <a:pPr lvl="1"/>
+            <a:r>
+              <a:rPr sz="1800" i="1">
+                <a:solidFill>
+                  <a:srgbClr val="B76E00"/>
+                </a:solidFill>
+                <a:latin typeface="Calibri"/>
+              </a:rPr>
+              <a:t>Answer: Removing or hiding detail irrelevant to the problem so only relevant information remains, giving a simpler model.</a:t>
+            </a:r>
+          </a:p>
+          <a:p>
+            <a:r>
+              <a:rPr sz="2200" b="1">
+                <a:solidFill>
+                  <a:srgbClr val="222222"/>
+                </a:solidFill>
+                <a:latin typeface="Calibri"/>
+              </a:rPr>
+              <a:t>2. Give the test question that separates representational abstraction from generalisation.</a:t>
+            </a:r>
+          </a:p>
+          <a:p>
+            <a:pPr lvl="1"/>
+            <a:r>
+              <a:rPr sz="1800" i="1">
+                <a:solidFill>
+                  <a:srgbClr val="B76E00"/>
+                </a:solidFill>
+                <a:latin typeface="Calibri"/>
+              </a:rPr>
+              <a:t>Answer: Am I stripping detail from one specific thing (representational) or grouping many things by shared characteristics (generalisation)?</a:t>
+            </a:r>
+          </a:p>
+          <a:p>
+            <a:r>
+              <a:rPr sz="2200" b="1">
+                <a:solidFill>
+                  <a:srgbClr val="222222"/>
+                </a:solidFill>
+                <a:latin typeface="Calibri"/>
+              </a:rPr>
+              <a:t>3. How is abstraction different from decomposition?</a:t>
+            </a:r>
+          </a:p>
+          <a:p>
+            <a:pPr lvl="1"/>
+            <a:r>
+              <a:rPr sz="1800" i="1">
+                <a:solidFill>
+                  <a:srgbClr val="B76E00"/>
+                </a:solidFill>
+                <a:latin typeface="Calibri"/>
+              </a:rPr>
+              <a:t>Answer: Abstraction removes or hides detail; decomposition breaks a problem into smaller sub-problems.</a:t>
             </a:r>
           </a:p>
         </p:txBody>
@@ -4230,7 +6638,7 @@
                 </a:solidFill>
                 <a:latin typeface="Calibri"/>
               </a:rPr>
-              <a:t>1. What does abstraction remove or hide from a problem?</a:t>
+              <a:t>1. From 1.1.1: describe the first two steps of the fetch stage, naming the registers.</a:t>
             </a:r>
           </a:p>
           <a:p>
@@ -4242,7 +6650,7 @@
                 </a:solidFill>
                 <a:latin typeface="Calibri"/>
               </a:rPr>
-              <a:t>Answer: Unnecessary detail that is irrelevant to solving the problem, leaving only the relevant information.</a:t>
+              <a:t>Answer: The contents of the PC are copied into the MAR; the instruction is fetched from that address via the data bus into the MDR.</a:t>
             </a:r>
           </a:p>
           <a:p>
@@ -4253,7 +6661,7 @@
                 </a:solidFill>
                 <a:latin typeface="Calibri"/>
               </a:rPr>
-              <a:t>2. Name the two types of abstraction in 2.1.1.</a:t>
+              <a:t>2. From 1.1.1: state the key difference between Von Neumann and Harvard architecture.</a:t>
             </a:r>
           </a:p>
           <a:p>
@@ -4265,7 +6673,7 @@
                 </a:solidFill>
                 <a:latin typeface="Calibri"/>
               </a:rPr>
-              <a:t>Answer: Representational abstraction and generalisation/categorisation.</a:t>
+              <a:t>Answer: Von Neumann has one shared memory and bus for data and instructions; Harvard has separate memories and buses for each.</a:t>
             </a:r>
           </a:p>
           <a:p>
@@ -4276,7 +6684,7 @@
                 </a:solidFill>
                 <a:latin typeface="Calibri"/>
               </a:rPr>
-              <a:t>3. How does abstraction differ from decomposition?</a:t>
+              <a:t>3. From 1.1.1: a CPU has a 16-bit address bus. How many locations can it address?</a:t>
             </a:r>
           </a:p>
           <a:p>
@@ -4288,7 +6696,7 @@
                 </a:solidFill>
                 <a:latin typeface="Calibri"/>
               </a:rPr>
-              <a:t>Answer: Abstraction removes/hides unnecessary detail; decomposition breaks a problem into smaller sub-problems.</a:t>
+              <a:t>Answer: 2^16 = 65,536 locations.</a:t>
             </a:r>
           </a:p>
           <a:p>
@@ -4299,7 +6707,7 @@
                 </a:solidFill>
                 <a:latin typeface="Calibri"/>
               </a:rPr>
-              <a:t>4. Interleaving (2.1.3): what is decomposition?</a:t>
+              <a:t>4. From 1.1.2: which RISC feature makes pipelining easier, and why?</a:t>
             </a:r>
           </a:p>
           <a:p>
@@ -4311,7 +6719,7 @@
                 </a:solidFill>
                 <a:latin typeface="Calibri"/>
               </a:rPr>
-              <a:t>Answer: Breaking a problem into smaller sub-problems, each able to be solved as a self-contained sub-procedure.</a:t>
+              <a:t>Answer: Fixed-length, simple instructions taking one cycle each, so every pipeline stage takes a predictable, equal time.</a:t>
             </a:r>
           </a:p>
           <a:p>
@@ -4322,7 +6730,7 @@
                 </a:solidFill>
                 <a:latin typeface="Calibri"/>
               </a:rPr>
-              <a:t>5. Interleaving (2.1.2): why might a satnav cache a computed route?</a:t>
+              <a:t>5. From 1.1.2: what is GPGPU?</a:t>
             </a:r>
           </a:p>
           <a:p>
@@ -4334,7 +6742,7 @@
                 </a:solidFill>
                 <a:latin typeface="Calibri"/>
               </a:rPr>
-              <a:t>Answer: To reuse an expensive result quickly without recomputing it, speeding up response and reducing load.</a:t>
+              <a:t>Answer: Using a GPU for general-purpose, non-graphics computation such as machine learning or scientific simulation.</a:t>
             </a:r>
           </a:p>
         </p:txBody>
@@ -4438,7 +6846,7 @@
                 </a:solidFill>
                 <a:latin typeface="Calibri"/>
               </a:rPr>
-              <a:t> — Removing or hiding detail not relevant to the problem so only useful information remains.</a:t>
+              <a:t> — Removing or hiding detail irrelevant to the problem so only relevant information remains, giving a simpler model.</a:t>
             </a:r>
           </a:p>
           <a:p>
@@ -4458,7 +6866,7 @@
                 </a:solidFill>
                 <a:latin typeface="Calibri"/>
               </a:rPr>
-              <a:t> — Simplifying one specific thing into a model of just the relevant detail, e.g. a road network as a graph.</a:t>
+              <a:t> — Simplifying one specific thing into a model of that problem, e.g. a road network as a graph.</a:t>
             </a:r>
           </a:p>
           <a:p>
@@ -4469,7 +6877,7 @@
                 </a:solidFill>
                 <a:latin typeface="Calibri"/>
               </a:rPr>
-              <a:t>Generalisation / categorisation</a:t>
+              <a:t>Generalisation</a:t>
             </a:r>
             <a:r>
               <a:rPr sz="1800">
@@ -4478,7 +6886,7 @@
                 </a:solidFill>
                 <a:latin typeface="Calibri"/>
               </a:rPr>
-              <a:t> — Grouping many things by their shared characteristics into one reusable model, e.g. an Account class.</a:t>
+              <a:t> — Grouping many things by shared characteristics into one reusable model, e.g. one Account type for all accounts.</a:t>
             </a:r>
           </a:p>
           <a:p>
@@ -4498,7 +6906,7 @@
                 </a:solidFill>
                 <a:latin typeface="Calibri"/>
               </a:rPr>
-              <a:t> — A simplified representation of reality keeping only the detail needed for the problem.</a:t>
+              <a:t> — A simplified representation of a real-world thing or system, built for a purpose.</a:t>
             </a:r>
           </a:p>
           <a:p>
@@ -4509,6 +6917,66 @@
                 </a:solidFill>
                 <a:latin typeface="Calibri"/>
               </a:rPr>
+              <a:t>Abstract model</a:t>
+            </a:r>
+            <a:r>
+              <a:rPr sz="1800">
+                <a:solidFill>
+                  <a:srgbClr val="222222"/>
+                </a:solidFill>
+                <a:latin typeface="Calibri"/>
+              </a:rPr>
+              <a:t> — A model keeping only the data and behaviour needed to solve the stated problem.</a:t>
+            </a:r>
+          </a:p>
+          <a:p>
+            <a:r>
+              <a:rPr b="1" sz="2000">
+                <a:solidFill>
+                  <a:srgbClr val="1A365D"/>
+                </a:solidFill>
+                <a:latin typeface="Calibri"/>
+              </a:rPr>
+              <a:t>Node</a:t>
+            </a:r>
+            <a:r>
+              <a:rPr sz="1800">
+                <a:solidFill>
+                  <a:srgbClr val="222222"/>
+                </a:solidFill>
+                <a:latin typeface="Calibri"/>
+              </a:rPr>
+              <a:t> — A point in a graph abstraction, such as a junction, station or place.</a:t>
+            </a:r>
+          </a:p>
+          <a:p>
+            <a:r>
+              <a:rPr b="1" sz="2000">
+                <a:solidFill>
+                  <a:srgbClr val="1A365D"/>
+                </a:solidFill>
+                <a:latin typeface="Calibri"/>
+              </a:rPr>
+              <a:t>Weighted edge</a:t>
+            </a:r>
+            <a:r>
+              <a:rPr sz="1800">
+                <a:solidFill>
+                  <a:srgbClr val="222222"/>
+                </a:solidFill>
+                <a:latin typeface="Calibri"/>
+              </a:rPr>
+              <a:t> — A connection between nodes carrying a cost such as distance or time.</a:t>
+            </a:r>
+          </a:p>
+          <a:p>
+            <a:r>
+              <a:rPr b="1" sz="2000">
+                <a:solidFill>
+                  <a:srgbClr val="1A365D"/>
+                </a:solidFill>
+                <a:latin typeface="Calibri"/>
+              </a:rPr>
               <a:t>Decomposition</a:t>
             </a:r>
             <a:r>
@@ -4518,67 +6986,7 @@
                 </a:solidFill>
                 <a:latin typeface="Calibri"/>
               </a:rPr>
-              <a:t> — Breaking a problem into smaller sub-problems; distinct from abstraction, which removes detail.</a:t>
-            </a:r>
-          </a:p>
-          <a:p>
-            <a:r>
-              <a:rPr b="1" sz="2000">
-                <a:solidFill>
-                  <a:srgbClr val="1A365D"/>
-                </a:solidFill>
-                <a:latin typeface="Calibri"/>
-              </a:rPr>
-              <a:t>Node</a:t>
-            </a:r>
-            <a:r>
-              <a:rPr sz="1800">
-                <a:solidFill>
-                  <a:srgbClr val="222222"/>
-                </a:solidFill>
-                <a:latin typeface="Calibri"/>
-              </a:rPr>
-              <a:t> — A point in a graph abstraction representing a place or object, e.g. a junction in a road network.</a:t>
-            </a:r>
-          </a:p>
-          <a:p>
-            <a:r>
-              <a:rPr b="1" sz="2000">
-                <a:solidFill>
-                  <a:srgbClr val="1A365D"/>
-                </a:solidFill>
-                <a:latin typeface="Calibri"/>
-              </a:rPr>
-              <a:t>Weighted edge</a:t>
-            </a:r>
-            <a:r>
-              <a:rPr sz="1800">
-                <a:solidFill>
-                  <a:srgbClr val="222222"/>
-                </a:solidFill>
-                <a:latin typeface="Calibri"/>
-              </a:rPr>
-              <a:t> — A connection in a graph carrying a value such as distance or time between two nodes.</a:t>
-            </a:r>
-          </a:p>
-          <a:p>
-            <a:r>
-              <a:rPr b="1" sz="2000">
-                <a:solidFill>
-                  <a:srgbClr val="1A365D"/>
-                </a:solidFill>
-                <a:latin typeface="Calibri"/>
-              </a:rPr>
-              <a:t>Relevant detail</a:t>
-            </a:r>
-            <a:r>
-              <a:rPr sz="1800">
-                <a:solidFill>
-                  <a:srgbClr val="222222"/>
-                </a:solidFill>
-                <a:latin typeface="Calibri"/>
-              </a:rPr>
-              <a:t> — Information that affects the problem's solution and so must be kept in the model.</a:t>
+              <a:t> — Breaking a problem into smaller sub-problems; a different skill from abstraction.</a:t>
             </a:r>
           </a:p>
         </p:txBody>
@@ -4667,37 +7075,49 @@
           <a:p>
             <a:pPr/>
             <a:r>
-              <a:rPr sz="2200" b="0">
-                <a:solidFill>
-                  <a:srgbClr val="222222"/>
-                </a:solidFill>
-                <a:latin typeface="Calibri"/>
-              </a:rPr>
-              <a:t>Abstraction removes or hides detail that is not relevant to the problem.</a:t>
+              <a:rPr sz="2000" b="0">
+                <a:solidFill>
+                  <a:srgbClr val="222222"/>
+                </a:solidFill>
+                <a:latin typeface="Calibri"/>
+              </a:rPr>
+              <a:t>Abstraction removes or hides unnecessary detail so only information relevant to the problem remains</a:t>
             </a:r>
           </a:p>
           <a:p>
             <a:pPr/>
             <a:r>
-              <a:rPr sz="2200" b="0">
-                <a:solidFill>
-                  <a:srgbClr val="222222"/>
-                </a:solidFill>
-                <a:latin typeface="Calibri"/>
-              </a:rPr>
-              <a:t>It leaves a simpler model that is faster to build, run and maintain.</a:t>
+              <a:rPr sz="2000" b="0">
+                <a:solidFill>
+                  <a:srgbClr val="222222"/>
+                </a:solidFill>
+                <a:latin typeface="Calibri"/>
+              </a:rPr>
+              <a:t>The result is a simpler model that is easier to understand, build and reason about</a:t>
             </a:r>
           </a:p>
           <a:p>
             <a:pPr/>
             <a:r>
-              <a:rPr sz="2200" b="0">
-                <a:solidFill>
-                  <a:srgbClr val="222222"/>
-                </a:solidFill>
-                <a:latin typeface="Calibri"/>
-              </a:rPr>
-              <a:t>The skill in the exam is justifying why discarded detail is irrelevant to this specific problem.</a:t>
+              <a:rPr sz="2000" b="0">
+                <a:solidFill>
+                  <a:srgbClr val="222222"/>
+                </a:solidFill>
+                <a:latin typeface="Calibri"/>
+              </a:rPr>
+              <a:t>You met it constantly in 1.1: a register diagram ignores transistors; block diagrams hide wiring</a:t>
+            </a:r>
+          </a:p>
+          <a:p>
+            <a:pPr/>
+            <a:r>
+              <a:rPr sz="2000" b="0">
+                <a:solidFill>
+                  <a:srgbClr val="222222"/>
+                </a:solidFill>
+                <a:latin typeface="Calibri"/>
+              </a:rPr>
+              <a:t>The skill being examined: deciding WHAT to remove, and justifying why it is safe</a:t>
             </a:r>
           </a:p>
         </p:txBody>
@@ -4757,7 +7177,7 @@
                 </a:solidFill>
                 <a:latin typeface="Calibri"/>
               </a:rPr>
-              <a:t>Representational abstraction</a:t>
+              <a:t>Why we need abstraction</a:t>
             </a:r>
           </a:p>
         </p:txBody>
@@ -4786,37 +7206,49 @@
           <a:p>
             <a:pPr/>
             <a:r>
-              <a:rPr sz="2200" b="0">
-                <a:solidFill>
-                  <a:srgbClr val="222222"/>
-                </a:solidFill>
-                <a:latin typeface="Calibri"/>
-              </a:rPr>
-              <a:t>Simplifies one specific thing into a model, e.g. a road network becomes a graph of nodes and weighted edges.</a:t>
+              <a:rPr sz="2000" b="0">
+                <a:solidFill>
+                  <a:srgbClr val="222222"/>
+                </a:solidFill>
+                <a:latin typeface="Calibri"/>
+              </a:rPr>
+              <a:t>Real systems have overwhelming detail; keeping all of it makes solutions impossibly complex</a:t>
             </a:r>
           </a:p>
           <a:p>
             <a:pPr/>
             <a:r>
-              <a:rPr sz="2200" b="0">
-                <a:solidFill>
-                  <a:srgbClr val="222222"/>
-                </a:solidFill>
-                <a:latin typeface="Calibri"/>
-              </a:rPr>
-              <a:t>The London Underground map keeps line order and interchanges but discards true geography.</a:t>
+              <a:rPr sz="2000" b="0">
+                <a:solidFill>
+                  <a:srgbClr val="222222"/>
+                </a:solidFill>
+                <a:latin typeface="Calibri"/>
+              </a:rPr>
+              <a:t>Removing irrelevant detail makes systems simpler, faster to build and easier to maintain</a:t>
             </a:r>
           </a:p>
           <a:p>
             <a:pPr/>
             <a:r>
-              <a:rPr sz="2200" b="0">
-                <a:solidFill>
-                  <a:srgbClr val="222222"/>
-                </a:solidFill>
-                <a:latin typeface="Calibri"/>
-              </a:rPr>
-              <a:t>Discarded detail (scenery, surface) does not affect the task of choosing a route.</a:t>
+              <a:rPr sz="2000" b="0">
+                <a:solidFill>
+                  <a:srgbClr val="222222"/>
+                </a:solidFill>
+                <a:latin typeface="Calibri"/>
+              </a:rPr>
+              <a:t>Programmers work at the right layer: a variable is an abstraction of a memory address</a:t>
+            </a:r>
+          </a:p>
+          <a:p>
+            <a:pPr/>
+            <a:r>
+              <a:rPr sz="2000" b="0">
+                <a:solidFill>
+                  <a:srgbClr val="222222"/>
+                </a:solidFill>
+                <a:latin typeface="Calibri"/>
+              </a:rPr>
+              <a:t>Users benefit too: an interface hides the implementation underneath</a:t>
             </a:r>
           </a:p>
         </p:txBody>
@@ -4876,7 +7308,7 @@
                 </a:solidFill>
                 <a:latin typeface="Calibri"/>
               </a:rPr>
-              <a:t>Generalisation / categorisation</a:t>
+              <a:t>Type 1: representational abstraction</a:t>
             </a:r>
           </a:p>
         </p:txBody>
@@ -4905,37 +7337,49 @@
           <a:p>
             <a:pPr/>
             <a:r>
-              <a:rPr sz="2200" b="0">
-                <a:solidFill>
-                  <a:srgbClr val="222222"/>
-                </a:solidFill>
-                <a:latin typeface="Calibri"/>
-              </a:rPr>
-              <a:t>Groups many things by their shared characteristics into one reusable model.</a:t>
+              <a:rPr sz="2000" b="0">
+                <a:solidFill>
+                  <a:srgbClr val="222222"/>
+                </a:solidFill>
+                <a:latin typeface="Calibri"/>
+              </a:rPr>
+              <a:t>Simplifies ONE specific thing into a model of that problem</a:t>
             </a:r>
           </a:p>
           <a:p>
             <a:pPr/>
             <a:r>
-              <a:rPr sz="2200" b="0">
-                <a:solidFill>
-                  <a:srgbClr val="222222"/>
-                </a:solidFill>
-                <a:latin typeface="Calibri"/>
-              </a:rPr>
-              <a:t>Example: one Account class capturing what savings and current accounts have in common.</a:t>
+              <a:rPr sz="2000" b="0">
+                <a:solidFill>
+                  <a:srgbClr val="222222"/>
+                </a:solidFill>
+                <a:latin typeface="Calibri"/>
+              </a:rPr>
+              <a:t>Example: a road network becomes a graph of nodes (junctions) and weighted edges (distances or times)</a:t>
             </a:r>
           </a:p>
           <a:p>
             <a:pPr/>
             <a:r>
-              <a:rPr sz="2200" b="0">
-                <a:solidFill>
-                  <a:srgbClr val="222222"/>
-                </a:solidFill>
-                <a:latin typeface="Calibri"/>
-              </a:rPr>
-              <a:t>Makes programs easier to extend — a new case reuses the existing general model.</a:t>
+              <a:rPr sz="2000" b="0">
+                <a:solidFill>
+                  <a:srgbClr val="222222"/>
+                </a:solidFill>
+                <a:latin typeface="Calibri"/>
+              </a:rPr>
+              <a:t>Example: the London Underground map, a game minimap, a flight simulator's simplified physics</a:t>
+            </a:r>
+          </a:p>
+          <a:p>
+            <a:pPr/>
+            <a:r>
+              <a:rPr sz="2000" b="0">
+                <a:solidFill>
+                  <a:srgbClr val="222222"/>
+                </a:solidFill>
+                <a:latin typeface="Calibri"/>
+              </a:rPr>
+              <a:t>Test question: am I stripping detail from one particular thing?</a:t>
             </a:r>
           </a:p>
         </p:txBody>
@@ -4995,7 +7439,7 @@
                 </a:solidFill>
                 <a:latin typeface="Calibri"/>
               </a:rPr>
-              <a:t>Abstraction vs decomposition (common trap)</a:t>
+              <a:t>Type 2: generalisation (categorisation)</a:t>
             </a:r>
           </a:p>
         </p:txBody>
@@ -5024,37 +7468,61 @@
           <a:p>
             <a:pPr/>
             <a:r>
-              <a:rPr sz="2200" b="0">
-                <a:solidFill>
-                  <a:srgbClr val="222222"/>
-                </a:solidFill>
-                <a:latin typeface="Calibri"/>
-              </a:rPr>
-              <a:t>Abstraction removes/hides unnecessary detail to simplify.</a:t>
+              <a:rPr sz="2000" b="0">
+                <a:solidFill>
+                  <a:srgbClr val="222222"/>
+                </a:solidFill>
+                <a:latin typeface="Calibri"/>
+              </a:rPr>
+              <a:t>Groups MANY things by their shared characteristics into one reusable model</a:t>
             </a:r>
           </a:p>
           <a:p>
             <a:pPr/>
             <a:r>
-              <a:rPr sz="2200" b="0">
-                <a:solidFill>
-                  <a:srgbClr val="222222"/>
-                </a:solidFill>
-                <a:latin typeface="Calibri"/>
-              </a:rPr>
-              <a:t>Decomposition breaks a problem into smaller sub-problems.</a:t>
+              <a:rPr sz="2000" b="0">
+                <a:solidFill>
+                  <a:srgbClr val="222222"/>
+                </a:solidFill>
+                <a:latin typeface="Calibri"/>
+              </a:rPr>
+              <a:t>Example: savings and current accounts handled by one Account type</a:t>
             </a:r>
           </a:p>
           <a:p>
             <a:pPr/>
             <a:r>
-              <a:rPr sz="2200" b="0">
-                <a:solidFill>
-                  <a:srgbClr val="222222"/>
-                </a:solidFill>
-                <a:latin typeface="Calibri"/>
-              </a:rPr>
-              <a:t>They are different skills — never blur them in an answer.</a:t>
+              <a:rPr sz="2000" b="0">
+                <a:solidFill>
+                  <a:srgbClr val="222222"/>
+                </a:solidFill>
+                <a:latin typeface="Calibri"/>
+              </a:rPr>
+              <a:t>Example: a Vehicle record covering cars, vans and bikes in a rental system</a:t>
+            </a:r>
+          </a:p>
+          <a:p>
+            <a:pPr/>
+            <a:r>
+              <a:rPr sz="2000" b="0">
+                <a:solidFill>
+                  <a:srgbClr val="222222"/>
+                </a:solidFill>
+                <a:latin typeface="Calibri"/>
+              </a:rPr>
+              <a:t>Test question: am I finding what many things have in common?</a:t>
+            </a:r>
+          </a:p>
+          <a:p>
+            <a:pPr/>
+            <a:r>
+              <a:rPr sz="1800" b="1">
+                <a:solidFill>
+                  <a:srgbClr val="B76E00"/>
+                </a:solidFill>
+                <a:latin typeface="Calibri"/>
+              </a:rPr>
+              <a:t>Exams expect BOTH types distinguished, each with a valid example.</a:t>
             </a:r>
           </a:p>
         </p:txBody>
